--- a/analysis/Windy新システムによる実験結果.pptx
+++ b/analysis/Windy新システムによる実験結果.pptx
@@ -2545,7 +2545,7 @@
         <p:spPr>
           <a:xfrm>
             <a:off x="304495" y="1067104"/>
-            <a:ext cx="1234440" cy="395151"/>
+            <a:ext cx="1234440" cy="345757"/>
           </a:xfrm>
           <a:prstGeom prst="rect">
             <a:avLst/>
@@ -2590,7 +2590,7 @@
         <p:spPr>
           <a:xfrm>
             <a:off x="341071" y="1094536"/>
-            <a:ext cx="1161288" cy="340287"/>
+            <a:ext cx="1161288" cy="290893"/>
           </a:xfrm>
           <a:prstGeom prst="rect">
             <a:avLst/>
@@ -2624,7 +2624,7 @@
         <p:spPr>
           <a:xfrm>
             <a:off x="1538935" y="1067104"/>
-            <a:ext cx="914400" cy="395151"/>
+            <a:ext cx="914400" cy="345757"/>
           </a:xfrm>
           <a:prstGeom prst="rect">
             <a:avLst/>
@@ -2669,7 +2669,7 @@
         <p:spPr>
           <a:xfrm>
             <a:off x="1575511" y="1094536"/>
-            <a:ext cx="841248" cy="340287"/>
+            <a:ext cx="841248" cy="290893"/>
           </a:xfrm>
           <a:prstGeom prst="rect">
             <a:avLst/>
@@ -2703,7 +2703,7 @@
         <p:spPr>
           <a:xfrm>
             <a:off x="2453335" y="1067104"/>
-            <a:ext cx="1005840" cy="395151"/>
+            <a:ext cx="1005840" cy="345757"/>
           </a:xfrm>
           <a:prstGeom prst="rect">
             <a:avLst/>
@@ -2748,7 +2748,7 @@
         <p:spPr>
           <a:xfrm>
             <a:off x="2489911" y="1094536"/>
-            <a:ext cx="932688" cy="340287"/>
+            <a:ext cx="932688" cy="290893"/>
           </a:xfrm>
           <a:prstGeom prst="rect">
             <a:avLst/>
@@ -2782,7 +2782,7 @@
         <p:spPr>
           <a:xfrm>
             <a:off x="3459175" y="1067104"/>
-            <a:ext cx="1051560" cy="395151"/>
+            <a:ext cx="1051560" cy="345757"/>
           </a:xfrm>
           <a:prstGeom prst="rect">
             <a:avLst/>
@@ -2827,7 +2827,7 @@
         <p:spPr>
           <a:xfrm>
             <a:off x="3495751" y="1094536"/>
-            <a:ext cx="978408" cy="340287"/>
+            <a:ext cx="978408" cy="290893"/>
           </a:xfrm>
           <a:prstGeom prst="rect">
             <a:avLst/>
@@ -2862,7 +2862,7 @@
         <p:spPr>
           <a:xfrm>
             <a:off x="4510735" y="1067104"/>
-            <a:ext cx="1234440" cy="395151"/>
+            <a:ext cx="1234440" cy="345757"/>
           </a:xfrm>
           <a:prstGeom prst="rect">
             <a:avLst/>
@@ -2907,7 +2907,7 @@
         <p:spPr>
           <a:xfrm>
             <a:off x="4547311" y="1094536"/>
-            <a:ext cx="1161288" cy="340287"/>
+            <a:ext cx="1161288" cy="290893"/>
           </a:xfrm>
           <a:prstGeom prst="rect">
             <a:avLst/>
@@ -2942,7 +2942,7 @@
         <p:spPr>
           <a:xfrm>
             <a:off x="5745175" y="1067104"/>
-            <a:ext cx="1005840" cy="395151"/>
+            <a:ext cx="1005840" cy="345757"/>
           </a:xfrm>
           <a:prstGeom prst="rect">
             <a:avLst/>
@@ -2987,7 +2987,7 @@
         <p:spPr>
           <a:xfrm>
             <a:off x="5781751" y="1094536"/>
-            <a:ext cx="932688" cy="340287"/>
+            <a:ext cx="932688" cy="290893"/>
           </a:xfrm>
           <a:prstGeom prst="rect">
             <a:avLst/>
@@ -3022,7 +3022,7 @@
         <p:spPr>
           <a:xfrm>
             <a:off x="6751015" y="1067104"/>
-            <a:ext cx="1783080" cy="395151"/>
+            <a:ext cx="1783080" cy="345757"/>
           </a:xfrm>
           <a:prstGeom prst="rect">
             <a:avLst/>
@@ -3067,7 +3067,7 @@
         <p:spPr>
           <a:xfrm>
             <a:off x="6787591" y="1094536"/>
-            <a:ext cx="1709928" cy="340287"/>
+            <a:ext cx="1709928" cy="290893"/>
           </a:xfrm>
           <a:prstGeom prst="rect">
             <a:avLst/>
@@ -3100,8 +3100,8 @@
         </p:nvSpPr>
         <p:spPr>
           <a:xfrm>
-            <a:off x="304495" y="1462255"/>
-            <a:ext cx="1234440" cy="395151"/>
+            <a:off x="304495" y="1412861"/>
+            <a:ext cx="1234440" cy="345757"/>
           </a:xfrm>
           <a:prstGeom prst="rect">
             <a:avLst/>
@@ -3145,8 +3145,8 @@
         </p:nvSpPr>
         <p:spPr>
           <a:xfrm>
-            <a:off x="341071" y="1498831"/>
-            <a:ext cx="1161288" cy="321999"/>
+            <a:off x="341071" y="1449437"/>
+            <a:ext cx="1161288" cy="272605"/>
           </a:xfrm>
           <a:prstGeom prst="rect">
             <a:avLst/>
@@ -3179,8 +3179,8 @@
         </p:nvSpPr>
         <p:spPr>
           <a:xfrm>
-            <a:off x="1538935" y="1462255"/>
-            <a:ext cx="914400" cy="395151"/>
+            <a:off x="1538935" y="1412861"/>
+            <a:ext cx="914400" cy="345757"/>
           </a:xfrm>
           <a:prstGeom prst="rect">
             <a:avLst/>
@@ -3224,8 +3224,8 @@
         </p:nvSpPr>
         <p:spPr>
           <a:xfrm>
-            <a:off x="1575511" y="1498831"/>
-            <a:ext cx="841248" cy="321999"/>
+            <a:off x="1575511" y="1449437"/>
+            <a:ext cx="841248" cy="272605"/>
           </a:xfrm>
           <a:prstGeom prst="rect">
             <a:avLst/>
@@ -3258,8 +3258,8 @@
         </p:nvSpPr>
         <p:spPr>
           <a:xfrm>
-            <a:off x="2453335" y="1462255"/>
-            <a:ext cx="1005840" cy="395151"/>
+            <a:off x="2453335" y="1412861"/>
+            <a:ext cx="1005840" cy="345757"/>
           </a:xfrm>
           <a:prstGeom prst="rect">
             <a:avLst/>
@@ -3303,8 +3303,8 @@
         </p:nvSpPr>
         <p:spPr>
           <a:xfrm>
-            <a:off x="2489911" y="1498831"/>
-            <a:ext cx="932688" cy="321999"/>
+            <a:off x="2489911" y="1449437"/>
+            <a:ext cx="932688" cy="272605"/>
           </a:xfrm>
           <a:prstGeom prst="rect">
             <a:avLst/>
@@ -3337,8 +3337,8 @@
         </p:nvSpPr>
         <p:spPr>
           <a:xfrm>
-            <a:off x="3459175" y="1462255"/>
-            <a:ext cx="1051560" cy="395151"/>
+            <a:off x="3459175" y="1412861"/>
+            <a:ext cx="1051560" cy="345757"/>
           </a:xfrm>
           <a:prstGeom prst="rect">
             <a:avLst/>
@@ -3382,8 +3382,8 @@
         </p:nvSpPr>
         <p:spPr>
           <a:xfrm>
-            <a:off x="3495751" y="1498831"/>
-            <a:ext cx="978408" cy="321999"/>
+            <a:off x="3495751" y="1449437"/>
+            <a:ext cx="978408" cy="272605"/>
           </a:xfrm>
           <a:prstGeom prst="rect">
             <a:avLst/>
@@ -3416,8 +3416,8 @@
         </p:nvSpPr>
         <p:spPr>
           <a:xfrm>
-            <a:off x="4510735" y="1462255"/>
-            <a:ext cx="1234440" cy="395151"/>
+            <a:off x="4510735" y="1412861"/>
+            <a:ext cx="1234440" cy="345757"/>
           </a:xfrm>
           <a:prstGeom prst="rect">
             <a:avLst/>
@@ -3461,8 +3461,8 @@
         </p:nvSpPr>
         <p:spPr>
           <a:xfrm>
-            <a:off x="4547311" y="1498831"/>
-            <a:ext cx="1161288" cy="321999"/>
+            <a:off x="4547311" y="1449437"/>
+            <a:ext cx="1161288" cy="272605"/>
           </a:xfrm>
           <a:prstGeom prst="rect">
             <a:avLst/>
@@ -3495,8 +3495,8 @@
         </p:nvSpPr>
         <p:spPr>
           <a:xfrm>
-            <a:off x="5745175" y="1462255"/>
-            <a:ext cx="1005840" cy="395151"/>
+            <a:off x="5745175" y="1412861"/>
+            <a:ext cx="1005840" cy="345757"/>
           </a:xfrm>
           <a:prstGeom prst="rect">
             <a:avLst/>
@@ -3540,8 +3540,8 @@
         </p:nvSpPr>
         <p:spPr>
           <a:xfrm>
-            <a:off x="5781751" y="1498831"/>
-            <a:ext cx="932688" cy="321999"/>
+            <a:off x="5781751" y="1449437"/>
+            <a:ext cx="932688" cy="272605"/>
           </a:xfrm>
           <a:prstGeom prst="rect">
             <a:avLst/>
@@ -3574,8 +3574,8 @@
         </p:nvSpPr>
         <p:spPr>
           <a:xfrm>
-            <a:off x="6751015" y="1462255"/>
-            <a:ext cx="1783080" cy="395151"/>
+            <a:off x="6751015" y="1412861"/>
+            <a:ext cx="1783080" cy="345757"/>
           </a:xfrm>
           <a:prstGeom prst="rect">
             <a:avLst/>
@@ -3619,8 +3619,8 @@
         </p:nvSpPr>
         <p:spPr>
           <a:xfrm>
-            <a:off x="6787591" y="1498831"/>
-            <a:ext cx="1709928" cy="321999"/>
+            <a:off x="6787591" y="1449437"/>
+            <a:ext cx="1709928" cy="272605"/>
           </a:xfrm>
           <a:prstGeom prst="rect">
             <a:avLst/>
@@ -3653,8 +3653,8 @@
         </p:nvSpPr>
         <p:spPr>
           <a:xfrm>
-            <a:off x="304495" y="1857406"/>
-            <a:ext cx="1234440" cy="395151"/>
+            <a:off x="304495" y="1758618"/>
+            <a:ext cx="1234440" cy="345757"/>
           </a:xfrm>
           <a:prstGeom prst="rect">
             <a:avLst/>
@@ -3698,8 +3698,8 @@
         </p:nvSpPr>
         <p:spPr>
           <a:xfrm>
-            <a:off x="341071" y="1893982"/>
-            <a:ext cx="1161288" cy="321999"/>
+            <a:off x="341071" y="1795194"/>
+            <a:ext cx="1161288" cy="272605"/>
           </a:xfrm>
           <a:prstGeom prst="rect">
             <a:avLst/>
@@ -3732,8 +3732,8 @@
         </p:nvSpPr>
         <p:spPr>
           <a:xfrm>
-            <a:off x="1538935" y="1857406"/>
-            <a:ext cx="914400" cy="395151"/>
+            <a:off x="1538935" y="1758618"/>
+            <a:ext cx="914400" cy="345757"/>
           </a:xfrm>
           <a:prstGeom prst="rect">
             <a:avLst/>
@@ -3777,8 +3777,8 @@
         </p:nvSpPr>
         <p:spPr>
           <a:xfrm>
-            <a:off x="1575511" y="1893982"/>
-            <a:ext cx="841248" cy="321999"/>
+            <a:off x="1575511" y="1795194"/>
+            <a:ext cx="841248" cy="272605"/>
           </a:xfrm>
           <a:prstGeom prst="rect">
             <a:avLst/>
@@ -3811,8 +3811,8 @@
         </p:nvSpPr>
         <p:spPr>
           <a:xfrm>
-            <a:off x="2453335" y="1857406"/>
-            <a:ext cx="1005840" cy="395151"/>
+            <a:off x="2453335" y="1758618"/>
+            <a:ext cx="1005840" cy="345757"/>
           </a:xfrm>
           <a:prstGeom prst="rect">
             <a:avLst/>
@@ -3856,8 +3856,8 @@
         </p:nvSpPr>
         <p:spPr>
           <a:xfrm>
-            <a:off x="2489911" y="1893982"/>
-            <a:ext cx="932688" cy="321999"/>
+            <a:off x="2489911" y="1795194"/>
+            <a:ext cx="932688" cy="272605"/>
           </a:xfrm>
           <a:prstGeom prst="rect">
             <a:avLst/>
@@ -3890,8 +3890,8 @@
         </p:nvSpPr>
         <p:spPr>
           <a:xfrm>
-            <a:off x="3459175" y="1857406"/>
-            <a:ext cx="1051560" cy="395151"/>
+            <a:off x="3459175" y="1758618"/>
+            <a:ext cx="1051560" cy="345757"/>
           </a:xfrm>
           <a:prstGeom prst="rect">
             <a:avLst/>
@@ -3935,8 +3935,8 @@
         </p:nvSpPr>
         <p:spPr>
           <a:xfrm>
-            <a:off x="3495751" y="1893982"/>
-            <a:ext cx="978408" cy="321999"/>
+            <a:off x="3495751" y="1795194"/>
+            <a:ext cx="978408" cy="272605"/>
           </a:xfrm>
           <a:prstGeom prst="rect">
             <a:avLst/>
@@ -3969,8 +3969,8 @@
         </p:nvSpPr>
         <p:spPr>
           <a:xfrm>
-            <a:off x="4510735" y="1857406"/>
-            <a:ext cx="1234440" cy="395151"/>
+            <a:off x="4510735" y="1758618"/>
+            <a:ext cx="1234440" cy="345757"/>
           </a:xfrm>
           <a:prstGeom prst="rect">
             <a:avLst/>
@@ -4014,8 +4014,8 @@
         </p:nvSpPr>
         <p:spPr>
           <a:xfrm>
-            <a:off x="4547311" y="1893982"/>
-            <a:ext cx="1161288" cy="321999"/>
+            <a:off x="4547311" y="1795194"/>
+            <a:ext cx="1161288" cy="272605"/>
           </a:xfrm>
           <a:prstGeom prst="rect">
             <a:avLst/>
@@ -4048,8 +4048,8 @@
         </p:nvSpPr>
         <p:spPr>
           <a:xfrm>
-            <a:off x="5745175" y="1857406"/>
-            <a:ext cx="1005840" cy="395151"/>
+            <a:off x="5745175" y="1758618"/>
+            <a:ext cx="1005840" cy="345757"/>
           </a:xfrm>
           <a:prstGeom prst="rect">
             <a:avLst/>
@@ -4093,8 +4093,8 @@
         </p:nvSpPr>
         <p:spPr>
           <a:xfrm>
-            <a:off x="5781751" y="1893982"/>
-            <a:ext cx="932688" cy="321999"/>
+            <a:off x="5781751" y="1795194"/>
+            <a:ext cx="932688" cy="272605"/>
           </a:xfrm>
           <a:prstGeom prst="rect">
             <a:avLst/>
@@ -4127,8 +4127,8 @@
         </p:nvSpPr>
         <p:spPr>
           <a:xfrm>
-            <a:off x="6751015" y="1857406"/>
-            <a:ext cx="1783080" cy="395151"/>
+            <a:off x="6751015" y="1758618"/>
+            <a:ext cx="1783080" cy="345757"/>
           </a:xfrm>
           <a:prstGeom prst="rect">
             <a:avLst/>
@@ -4172,8 +4172,8 @@
         </p:nvSpPr>
         <p:spPr>
           <a:xfrm>
-            <a:off x="6787591" y="1893982"/>
-            <a:ext cx="1709928" cy="321999"/>
+            <a:off x="6787591" y="1795194"/>
+            <a:ext cx="1709928" cy="272605"/>
           </a:xfrm>
           <a:prstGeom prst="rect">
             <a:avLst/>
@@ -4206,8 +4206,8 @@
         </p:nvSpPr>
         <p:spPr>
           <a:xfrm>
-            <a:off x="304495" y="2252557"/>
-            <a:ext cx="1234440" cy="395151"/>
+            <a:off x="304495" y="2104375"/>
+            <a:ext cx="1234440" cy="345757"/>
           </a:xfrm>
           <a:prstGeom prst="rect">
             <a:avLst/>
@@ -4251,8 +4251,8 @@
         </p:nvSpPr>
         <p:spPr>
           <a:xfrm>
-            <a:off x="341071" y="2289133"/>
-            <a:ext cx="1161288" cy="321999"/>
+            <a:off x="341071" y="2140951"/>
+            <a:ext cx="1161288" cy="272605"/>
           </a:xfrm>
           <a:prstGeom prst="rect">
             <a:avLst/>
@@ -4285,8 +4285,8 @@
         </p:nvSpPr>
         <p:spPr>
           <a:xfrm>
-            <a:off x="1538935" y="2252557"/>
-            <a:ext cx="914400" cy="395151"/>
+            <a:off x="1538935" y="2104375"/>
+            <a:ext cx="914400" cy="345757"/>
           </a:xfrm>
           <a:prstGeom prst="rect">
             <a:avLst/>
@@ -4330,8 +4330,8 @@
         </p:nvSpPr>
         <p:spPr>
           <a:xfrm>
-            <a:off x="1575511" y="2289133"/>
-            <a:ext cx="841248" cy="321999"/>
+            <a:off x="1575511" y="2140951"/>
+            <a:ext cx="841248" cy="272605"/>
           </a:xfrm>
           <a:prstGeom prst="rect">
             <a:avLst/>
@@ -4364,8 +4364,8 @@
         </p:nvSpPr>
         <p:spPr>
           <a:xfrm>
-            <a:off x="2453335" y="2252557"/>
-            <a:ext cx="1005840" cy="395151"/>
+            <a:off x="2453335" y="2104375"/>
+            <a:ext cx="1005840" cy="345757"/>
           </a:xfrm>
           <a:prstGeom prst="rect">
             <a:avLst/>
@@ -4409,8 +4409,8 @@
         </p:nvSpPr>
         <p:spPr>
           <a:xfrm>
-            <a:off x="2489911" y="2289133"/>
-            <a:ext cx="932688" cy="321999"/>
+            <a:off x="2489911" y="2140951"/>
+            <a:ext cx="932688" cy="272605"/>
           </a:xfrm>
           <a:prstGeom prst="rect">
             <a:avLst/>
@@ -4443,8 +4443,8 @@
         </p:nvSpPr>
         <p:spPr>
           <a:xfrm>
-            <a:off x="3459175" y="2252557"/>
-            <a:ext cx="1051560" cy="395151"/>
+            <a:off x="3459175" y="2104375"/>
+            <a:ext cx="1051560" cy="345757"/>
           </a:xfrm>
           <a:prstGeom prst="rect">
             <a:avLst/>
@@ -4488,8 +4488,8 @@
         </p:nvSpPr>
         <p:spPr>
           <a:xfrm>
-            <a:off x="3495751" y="2289133"/>
-            <a:ext cx="978408" cy="321999"/>
+            <a:off x="3495751" y="2140951"/>
+            <a:ext cx="978408" cy="272605"/>
           </a:xfrm>
           <a:prstGeom prst="rect">
             <a:avLst/>
@@ -4522,8 +4522,8 @@
         </p:nvSpPr>
         <p:spPr>
           <a:xfrm>
-            <a:off x="4510735" y="2252557"/>
-            <a:ext cx="1234440" cy="395151"/>
+            <a:off x="4510735" y="2104375"/>
+            <a:ext cx="1234440" cy="345757"/>
           </a:xfrm>
           <a:prstGeom prst="rect">
             <a:avLst/>
@@ -4567,8 +4567,8 @@
         </p:nvSpPr>
         <p:spPr>
           <a:xfrm>
-            <a:off x="4547311" y="2289133"/>
-            <a:ext cx="1161288" cy="321999"/>
+            <a:off x="4547311" y="2140951"/>
+            <a:ext cx="1161288" cy="272605"/>
           </a:xfrm>
           <a:prstGeom prst="rect">
             <a:avLst/>
@@ -4601,8 +4601,8 @@
         </p:nvSpPr>
         <p:spPr>
           <a:xfrm>
-            <a:off x="5745175" y="2252557"/>
-            <a:ext cx="1005840" cy="395151"/>
+            <a:off x="5745175" y="2104375"/>
+            <a:ext cx="1005840" cy="345757"/>
           </a:xfrm>
           <a:prstGeom prst="rect">
             <a:avLst/>
@@ -4646,8 +4646,8 @@
         </p:nvSpPr>
         <p:spPr>
           <a:xfrm>
-            <a:off x="5781751" y="2289133"/>
-            <a:ext cx="932688" cy="321999"/>
+            <a:off x="5781751" y="2140951"/>
+            <a:ext cx="932688" cy="272605"/>
           </a:xfrm>
           <a:prstGeom prst="rect">
             <a:avLst/>
@@ -4680,8 +4680,8 @@
         </p:nvSpPr>
         <p:spPr>
           <a:xfrm>
-            <a:off x="6751015" y="2252557"/>
-            <a:ext cx="1783080" cy="395151"/>
+            <a:off x="6751015" y="2104375"/>
+            <a:ext cx="1783080" cy="345757"/>
           </a:xfrm>
           <a:prstGeom prst="rect">
             <a:avLst/>
@@ -4725,8 +4725,8 @@
         </p:nvSpPr>
         <p:spPr>
           <a:xfrm>
-            <a:off x="6787591" y="2289133"/>
-            <a:ext cx="1709928" cy="321999"/>
+            <a:off x="6787591" y="2140951"/>
+            <a:ext cx="1709928" cy="272605"/>
           </a:xfrm>
           <a:prstGeom prst="rect">
             <a:avLst/>
@@ -4759,8 +4759,8 @@
         </p:nvSpPr>
         <p:spPr>
           <a:xfrm>
-            <a:off x="304495" y="2647708"/>
-            <a:ext cx="1234440" cy="395151"/>
+            <a:off x="304495" y="2450132"/>
+            <a:ext cx="1234440" cy="345757"/>
           </a:xfrm>
           <a:prstGeom prst="rect">
             <a:avLst/>
@@ -4804,8 +4804,8 @@
         </p:nvSpPr>
         <p:spPr>
           <a:xfrm>
-            <a:off x="341071" y="2684284"/>
-            <a:ext cx="1161288" cy="321999"/>
+            <a:off x="341071" y="2486708"/>
+            <a:ext cx="1161288" cy="272605"/>
           </a:xfrm>
           <a:prstGeom prst="rect">
             <a:avLst/>
@@ -4838,8 +4838,8 @@
         </p:nvSpPr>
         <p:spPr>
           <a:xfrm>
-            <a:off x="1538935" y="2647708"/>
-            <a:ext cx="914400" cy="395151"/>
+            <a:off x="1538935" y="2450132"/>
+            <a:ext cx="914400" cy="345757"/>
           </a:xfrm>
           <a:prstGeom prst="rect">
             <a:avLst/>
@@ -4883,8 +4883,8 @@
         </p:nvSpPr>
         <p:spPr>
           <a:xfrm>
-            <a:off x="1575511" y="2684284"/>
-            <a:ext cx="841248" cy="321999"/>
+            <a:off x="1575511" y="2486708"/>
+            <a:ext cx="841248" cy="272605"/>
           </a:xfrm>
           <a:prstGeom prst="rect">
             <a:avLst/>
@@ -4917,8 +4917,8 @@
         </p:nvSpPr>
         <p:spPr>
           <a:xfrm>
-            <a:off x="2453335" y="2647708"/>
-            <a:ext cx="1005840" cy="395151"/>
+            <a:off x="2453335" y="2450132"/>
+            <a:ext cx="1005840" cy="345757"/>
           </a:xfrm>
           <a:prstGeom prst="rect">
             <a:avLst/>
@@ -4962,8 +4962,8 @@
         </p:nvSpPr>
         <p:spPr>
           <a:xfrm>
-            <a:off x="2489911" y="2684284"/>
-            <a:ext cx="932688" cy="321999"/>
+            <a:off x="2489911" y="2486708"/>
+            <a:ext cx="932688" cy="272605"/>
           </a:xfrm>
           <a:prstGeom prst="rect">
             <a:avLst/>
@@ -4996,8 +4996,8 @@
         </p:nvSpPr>
         <p:spPr>
           <a:xfrm>
-            <a:off x="3459175" y="2647708"/>
-            <a:ext cx="1051560" cy="395151"/>
+            <a:off x="3459175" y="2450132"/>
+            <a:ext cx="1051560" cy="345757"/>
           </a:xfrm>
           <a:prstGeom prst="rect">
             <a:avLst/>
@@ -5041,8 +5041,8 @@
         </p:nvSpPr>
         <p:spPr>
           <a:xfrm>
-            <a:off x="3495751" y="2684284"/>
-            <a:ext cx="978408" cy="321999"/>
+            <a:off x="3495751" y="2486708"/>
+            <a:ext cx="978408" cy="272605"/>
           </a:xfrm>
           <a:prstGeom prst="rect">
             <a:avLst/>
@@ -5075,8 +5075,8 @@
         </p:nvSpPr>
         <p:spPr>
           <a:xfrm>
-            <a:off x="4510735" y="2647708"/>
-            <a:ext cx="1234440" cy="395151"/>
+            <a:off x="4510735" y="2450132"/>
+            <a:ext cx="1234440" cy="345757"/>
           </a:xfrm>
           <a:prstGeom prst="rect">
             <a:avLst/>
@@ -5120,8 +5120,8 @@
         </p:nvSpPr>
         <p:spPr>
           <a:xfrm>
-            <a:off x="4547311" y="2684284"/>
-            <a:ext cx="1161288" cy="321999"/>
+            <a:off x="4547311" y="2486708"/>
+            <a:ext cx="1161288" cy="272605"/>
           </a:xfrm>
           <a:prstGeom prst="rect">
             <a:avLst/>
@@ -5154,8 +5154,8 @@
         </p:nvSpPr>
         <p:spPr>
           <a:xfrm>
-            <a:off x="5745175" y="2647708"/>
-            <a:ext cx="1005840" cy="395151"/>
+            <a:off x="5745175" y="2450132"/>
+            <a:ext cx="1005840" cy="345757"/>
           </a:xfrm>
           <a:prstGeom prst="rect">
             <a:avLst/>
@@ -5199,8 +5199,8 @@
         </p:nvSpPr>
         <p:spPr>
           <a:xfrm>
-            <a:off x="5781751" y="2684284"/>
-            <a:ext cx="932688" cy="321999"/>
+            <a:off x="5781751" y="2486708"/>
+            <a:ext cx="932688" cy="272605"/>
           </a:xfrm>
           <a:prstGeom prst="rect">
             <a:avLst/>
@@ -5233,8 +5233,8 @@
         </p:nvSpPr>
         <p:spPr>
           <a:xfrm>
-            <a:off x="6751015" y="2647708"/>
-            <a:ext cx="1783080" cy="395151"/>
+            <a:off x="6751015" y="2450132"/>
+            <a:ext cx="1783080" cy="345757"/>
           </a:xfrm>
           <a:prstGeom prst="rect">
             <a:avLst/>
@@ -5278,8 +5278,8 @@
         </p:nvSpPr>
         <p:spPr>
           <a:xfrm>
-            <a:off x="6787591" y="2684284"/>
-            <a:ext cx="1709928" cy="321999"/>
+            <a:off x="6787591" y="2486708"/>
+            <a:ext cx="1709928" cy="272605"/>
           </a:xfrm>
           <a:prstGeom prst="rect">
             <a:avLst/>
@@ -5312,8 +5312,8 @@
         </p:nvSpPr>
         <p:spPr>
           <a:xfrm>
-            <a:off x="304495" y="3042859"/>
-            <a:ext cx="1234440" cy="395151"/>
+            <a:off x="304495" y="2795889"/>
+            <a:ext cx="1234440" cy="345757"/>
           </a:xfrm>
           <a:prstGeom prst="rect">
             <a:avLst/>
@@ -5357,8 +5357,8 @@
         </p:nvSpPr>
         <p:spPr>
           <a:xfrm>
-            <a:off x="341071" y="3079435"/>
-            <a:ext cx="1161288" cy="321999"/>
+            <a:off x="341071" y="2832465"/>
+            <a:ext cx="1161288" cy="272605"/>
           </a:xfrm>
           <a:prstGeom prst="rect">
             <a:avLst/>
@@ -5391,8 +5391,8 @@
         </p:nvSpPr>
         <p:spPr>
           <a:xfrm>
-            <a:off x="1538935" y="3042859"/>
-            <a:ext cx="914400" cy="395151"/>
+            <a:off x="1538935" y="2795889"/>
+            <a:ext cx="914400" cy="345757"/>
           </a:xfrm>
           <a:prstGeom prst="rect">
             <a:avLst/>
@@ -5436,8 +5436,8 @@
         </p:nvSpPr>
         <p:spPr>
           <a:xfrm>
-            <a:off x="1575511" y="3079435"/>
-            <a:ext cx="841248" cy="321999"/>
+            <a:off x="1575511" y="2832465"/>
+            <a:ext cx="841248" cy="272605"/>
           </a:xfrm>
           <a:prstGeom prst="rect">
             <a:avLst/>
@@ -5470,8 +5470,8 @@
         </p:nvSpPr>
         <p:spPr>
           <a:xfrm>
-            <a:off x="2453335" y="3042859"/>
-            <a:ext cx="1005840" cy="395151"/>
+            <a:off x="2453335" y="2795889"/>
+            <a:ext cx="1005840" cy="345757"/>
           </a:xfrm>
           <a:prstGeom prst="rect">
             <a:avLst/>
@@ -5515,8 +5515,8 @@
         </p:nvSpPr>
         <p:spPr>
           <a:xfrm>
-            <a:off x="2489911" y="3079435"/>
-            <a:ext cx="932688" cy="321999"/>
+            <a:off x="2489911" y="2832465"/>
+            <a:ext cx="932688" cy="272605"/>
           </a:xfrm>
           <a:prstGeom prst="rect">
             <a:avLst/>
@@ -5549,8 +5549,8 @@
         </p:nvSpPr>
         <p:spPr>
           <a:xfrm>
-            <a:off x="3459175" y="3042859"/>
-            <a:ext cx="1051560" cy="395151"/>
+            <a:off x="3459175" y="2795889"/>
+            <a:ext cx="1051560" cy="345757"/>
           </a:xfrm>
           <a:prstGeom prst="rect">
             <a:avLst/>
@@ -5594,8 +5594,8 @@
         </p:nvSpPr>
         <p:spPr>
           <a:xfrm>
-            <a:off x="3495751" y="3079435"/>
-            <a:ext cx="978408" cy="321999"/>
+            <a:off x="3495751" y="2832465"/>
+            <a:ext cx="978408" cy="272605"/>
           </a:xfrm>
           <a:prstGeom prst="rect">
             <a:avLst/>
@@ -5628,8 +5628,8 @@
         </p:nvSpPr>
         <p:spPr>
           <a:xfrm>
-            <a:off x="4510735" y="3042859"/>
-            <a:ext cx="1234440" cy="395151"/>
+            <a:off x="4510735" y="2795889"/>
+            <a:ext cx="1234440" cy="345757"/>
           </a:xfrm>
           <a:prstGeom prst="rect">
             <a:avLst/>
@@ -5673,8 +5673,8 @@
         </p:nvSpPr>
         <p:spPr>
           <a:xfrm>
-            <a:off x="4547311" y="3079435"/>
-            <a:ext cx="1161288" cy="321999"/>
+            <a:off x="4547311" y="2832465"/>
+            <a:ext cx="1161288" cy="272605"/>
           </a:xfrm>
           <a:prstGeom prst="rect">
             <a:avLst/>
@@ -5707,8 +5707,8 @@
         </p:nvSpPr>
         <p:spPr>
           <a:xfrm>
-            <a:off x="5745175" y="3042859"/>
-            <a:ext cx="1005840" cy="395151"/>
+            <a:off x="5745175" y="2795889"/>
+            <a:ext cx="1005840" cy="345757"/>
           </a:xfrm>
           <a:prstGeom prst="rect">
             <a:avLst/>
@@ -5752,8 +5752,8 @@
         </p:nvSpPr>
         <p:spPr>
           <a:xfrm>
-            <a:off x="5781751" y="3079435"/>
-            <a:ext cx="932688" cy="321999"/>
+            <a:off x="5781751" y="2832465"/>
+            <a:ext cx="932688" cy="272605"/>
           </a:xfrm>
           <a:prstGeom prst="rect">
             <a:avLst/>
@@ -5786,8 +5786,8 @@
         </p:nvSpPr>
         <p:spPr>
           <a:xfrm>
-            <a:off x="6751015" y="3042859"/>
-            <a:ext cx="1783080" cy="395151"/>
+            <a:off x="6751015" y="2795889"/>
+            <a:ext cx="1783080" cy="345757"/>
           </a:xfrm>
           <a:prstGeom prst="rect">
             <a:avLst/>
@@ -5831,8 +5831,8 @@
         </p:nvSpPr>
         <p:spPr>
           <a:xfrm>
-            <a:off x="6787591" y="3079435"/>
-            <a:ext cx="1709928" cy="321999"/>
+            <a:off x="6787591" y="2832465"/>
+            <a:ext cx="1709928" cy="272605"/>
           </a:xfrm>
           <a:prstGeom prst="rect">
             <a:avLst/>
@@ -5865,8 +5865,8 @@
         </p:nvSpPr>
         <p:spPr>
           <a:xfrm>
-            <a:off x="304495" y="3438010"/>
-            <a:ext cx="1234440" cy="395151"/>
+            <a:off x="304495" y="3141646"/>
+            <a:ext cx="1234440" cy="345757"/>
           </a:xfrm>
           <a:prstGeom prst="rect">
             <a:avLst/>
@@ -5910,8 +5910,8 @@
         </p:nvSpPr>
         <p:spPr>
           <a:xfrm>
-            <a:off x="341071" y="3474586"/>
-            <a:ext cx="1161288" cy="321999"/>
+            <a:off x="341071" y="3178222"/>
+            <a:ext cx="1161288" cy="272605"/>
           </a:xfrm>
           <a:prstGeom prst="rect">
             <a:avLst/>
@@ -5944,8 +5944,8 @@
         </p:nvSpPr>
         <p:spPr>
           <a:xfrm>
-            <a:off x="1538935" y="3438010"/>
-            <a:ext cx="914400" cy="395151"/>
+            <a:off x="1538935" y="3141646"/>
+            <a:ext cx="914400" cy="345757"/>
           </a:xfrm>
           <a:prstGeom prst="rect">
             <a:avLst/>
@@ -5989,8 +5989,8 @@
         </p:nvSpPr>
         <p:spPr>
           <a:xfrm>
-            <a:off x="1575511" y="3474586"/>
-            <a:ext cx="841248" cy="321999"/>
+            <a:off x="1575511" y="3178222"/>
+            <a:ext cx="841248" cy="272605"/>
           </a:xfrm>
           <a:prstGeom prst="rect">
             <a:avLst/>
@@ -6023,8 +6023,8 @@
         </p:nvSpPr>
         <p:spPr>
           <a:xfrm>
-            <a:off x="2453335" y="3438010"/>
-            <a:ext cx="1005840" cy="395151"/>
+            <a:off x="2453335" y="3141646"/>
+            <a:ext cx="1005840" cy="345757"/>
           </a:xfrm>
           <a:prstGeom prst="rect">
             <a:avLst/>
@@ -6068,8 +6068,8 @@
         </p:nvSpPr>
         <p:spPr>
           <a:xfrm>
-            <a:off x="2489911" y="3474586"/>
-            <a:ext cx="932688" cy="321999"/>
+            <a:off x="2489911" y="3178222"/>
+            <a:ext cx="932688" cy="272605"/>
           </a:xfrm>
           <a:prstGeom prst="rect">
             <a:avLst/>
@@ -6102,8 +6102,8 @@
         </p:nvSpPr>
         <p:spPr>
           <a:xfrm>
-            <a:off x="3459175" y="3438010"/>
-            <a:ext cx="1051560" cy="395151"/>
+            <a:off x="3459175" y="3141646"/>
+            <a:ext cx="1051560" cy="345757"/>
           </a:xfrm>
           <a:prstGeom prst="rect">
             <a:avLst/>
@@ -6147,8 +6147,8 @@
         </p:nvSpPr>
         <p:spPr>
           <a:xfrm>
-            <a:off x="3495751" y="3474586"/>
-            <a:ext cx="978408" cy="321999"/>
+            <a:off x="3495751" y="3178222"/>
+            <a:ext cx="978408" cy="272605"/>
           </a:xfrm>
           <a:prstGeom prst="rect">
             <a:avLst/>
@@ -6181,8 +6181,8 @@
         </p:nvSpPr>
         <p:spPr>
           <a:xfrm>
-            <a:off x="4510735" y="3438010"/>
-            <a:ext cx="1234440" cy="395151"/>
+            <a:off x="4510735" y="3141646"/>
+            <a:ext cx="1234440" cy="345757"/>
           </a:xfrm>
           <a:prstGeom prst="rect">
             <a:avLst/>
@@ -6226,8 +6226,8 @@
         </p:nvSpPr>
         <p:spPr>
           <a:xfrm>
-            <a:off x="4547311" y="3474586"/>
-            <a:ext cx="1161288" cy="321999"/>
+            <a:off x="4547311" y="3178222"/>
+            <a:ext cx="1161288" cy="272605"/>
           </a:xfrm>
           <a:prstGeom prst="rect">
             <a:avLst/>
@@ -6260,8 +6260,8 @@
         </p:nvSpPr>
         <p:spPr>
           <a:xfrm>
-            <a:off x="5745175" y="3438010"/>
-            <a:ext cx="1005840" cy="395151"/>
+            <a:off x="5745175" y="3141646"/>
+            <a:ext cx="1005840" cy="345757"/>
           </a:xfrm>
           <a:prstGeom prst="rect">
             <a:avLst/>
@@ -6305,8 +6305,8 @@
         </p:nvSpPr>
         <p:spPr>
           <a:xfrm>
-            <a:off x="5781751" y="3474586"/>
-            <a:ext cx="932688" cy="321999"/>
+            <a:off x="5781751" y="3178222"/>
+            <a:ext cx="932688" cy="272605"/>
           </a:xfrm>
           <a:prstGeom prst="rect">
             <a:avLst/>
@@ -6339,8 +6339,8 @@
         </p:nvSpPr>
         <p:spPr>
           <a:xfrm>
-            <a:off x="6751015" y="3438010"/>
-            <a:ext cx="1783080" cy="395151"/>
+            <a:off x="6751015" y="3141646"/>
+            <a:ext cx="1783080" cy="345757"/>
           </a:xfrm>
           <a:prstGeom prst="rect">
             <a:avLst/>
@@ -6384,8 +6384,8 @@
         </p:nvSpPr>
         <p:spPr>
           <a:xfrm>
-            <a:off x="6787591" y="3474586"/>
-            <a:ext cx="1709928" cy="321999"/>
+            <a:off x="6787591" y="3178222"/>
+            <a:ext cx="1709928" cy="272605"/>
           </a:xfrm>
           <a:prstGeom prst="rect">
             <a:avLst/>
@@ -6418,8 +6418,8 @@
         </p:nvSpPr>
         <p:spPr>
           <a:xfrm>
-            <a:off x="304495" y="3833161"/>
-            <a:ext cx="1234440" cy="395151"/>
+            <a:off x="304495" y="3487403"/>
+            <a:ext cx="1234440" cy="345757"/>
           </a:xfrm>
           <a:prstGeom prst="rect">
             <a:avLst/>
@@ -6463,8 +6463,8 @@
         </p:nvSpPr>
         <p:spPr>
           <a:xfrm>
-            <a:off x="341071" y="3869737"/>
-            <a:ext cx="1161288" cy="321999"/>
+            <a:off x="341071" y="3523979"/>
+            <a:ext cx="1161288" cy="272605"/>
           </a:xfrm>
           <a:prstGeom prst="rect">
             <a:avLst/>
@@ -6497,8 +6497,8 @@
         </p:nvSpPr>
         <p:spPr>
           <a:xfrm>
-            <a:off x="1538935" y="3833161"/>
-            <a:ext cx="914400" cy="395151"/>
+            <a:off x="1538935" y="3487403"/>
+            <a:ext cx="914400" cy="345757"/>
           </a:xfrm>
           <a:prstGeom prst="rect">
             <a:avLst/>
@@ -6542,8 +6542,8 @@
         </p:nvSpPr>
         <p:spPr>
           <a:xfrm>
-            <a:off x="1575511" y="3869737"/>
-            <a:ext cx="841248" cy="321999"/>
+            <a:off x="1575511" y="3523979"/>
+            <a:ext cx="841248" cy="272605"/>
           </a:xfrm>
           <a:prstGeom prst="rect">
             <a:avLst/>
@@ -6576,8 +6576,8 @@
         </p:nvSpPr>
         <p:spPr>
           <a:xfrm>
-            <a:off x="2453335" y="3833161"/>
-            <a:ext cx="1005840" cy="395151"/>
+            <a:off x="2453335" y="3487403"/>
+            <a:ext cx="1005840" cy="345757"/>
           </a:xfrm>
           <a:prstGeom prst="rect">
             <a:avLst/>
@@ -6621,8 +6621,8 @@
         </p:nvSpPr>
         <p:spPr>
           <a:xfrm>
-            <a:off x="2489911" y="3869737"/>
-            <a:ext cx="932688" cy="321999"/>
+            <a:off x="2489911" y="3523979"/>
+            <a:ext cx="932688" cy="272605"/>
           </a:xfrm>
           <a:prstGeom prst="rect">
             <a:avLst/>
@@ -6655,8 +6655,8 @@
         </p:nvSpPr>
         <p:spPr>
           <a:xfrm>
-            <a:off x="3459175" y="3833161"/>
-            <a:ext cx="1051560" cy="395151"/>
+            <a:off x="3459175" y="3487403"/>
+            <a:ext cx="1051560" cy="345757"/>
           </a:xfrm>
           <a:prstGeom prst="rect">
             <a:avLst/>
@@ -6700,8 +6700,8 @@
         </p:nvSpPr>
         <p:spPr>
           <a:xfrm>
-            <a:off x="3495751" y="3869737"/>
-            <a:ext cx="978408" cy="321999"/>
+            <a:off x="3495751" y="3523979"/>
+            <a:ext cx="978408" cy="272605"/>
           </a:xfrm>
           <a:prstGeom prst="rect">
             <a:avLst/>
@@ -6734,8 +6734,8 @@
         </p:nvSpPr>
         <p:spPr>
           <a:xfrm>
-            <a:off x="4510735" y="3833161"/>
-            <a:ext cx="1234440" cy="395151"/>
+            <a:off x="4510735" y="3487403"/>
+            <a:ext cx="1234440" cy="345757"/>
           </a:xfrm>
           <a:prstGeom prst="rect">
             <a:avLst/>
@@ -6779,8 +6779,8 @@
         </p:nvSpPr>
         <p:spPr>
           <a:xfrm>
-            <a:off x="4547311" y="3869737"/>
-            <a:ext cx="1161288" cy="321999"/>
+            <a:off x="4547311" y="3523979"/>
+            <a:ext cx="1161288" cy="272605"/>
           </a:xfrm>
           <a:prstGeom prst="rect">
             <a:avLst/>
@@ -6813,8 +6813,8 @@
         </p:nvSpPr>
         <p:spPr>
           <a:xfrm>
-            <a:off x="5745175" y="3833161"/>
-            <a:ext cx="1005840" cy="395151"/>
+            <a:off x="5745175" y="3487403"/>
+            <a:ext cx="1005840" cy="345757"/>
           </a:xfrm>
           <a:prstGeom prst="rect">
             <a:avLst/>
@@ -6858,8 +6858,8 @@
         </p:nvSpPr>
         <p:spPr>
           <a:xfrm>
-            <a:off x="5781751" y="3869737"/>
-            <a:ext cx="932688" cy="321999"/>
+            <a:off x="5781751" y="3523979"/>
+            <a:ext cx="932688" cy="272605"/>
           </a:xfrm>
           <a:prstGeom prst="rect">
             <a:avLst/>
@@ -6892,8 +6892,8 @@
         </p:nvSpPr>
         <p:spPr>
           <a:xfrm>
-            <a:off x="6751015" y="3833161"/>
-            <a:ext cx="1783080" cy="395151"/>
+            <a:off x="6751015" y="3487403"/>
+            <a:ext cx="1783080" cy="345757"/>
           </a:xfrm>
           <a:prstGeom prst="rect">
             <a:avLst/>
@@ -6937,8 +6937,8 @@
         </p:nvSpPr>
         <p:spPr>
           <a:xfrm>
-            <a:off x="6787591" y="3869737"/>
-            <a:ext cx="1709928" cy="321999"/>
+            <a:off x="6787591" y="3523979"/>
+            <a:ext cx="1709928" cy="272605"/>
           </a:xfrm>
           <a:prstGeom prst="rect">
             <a:avLst/>
@@ -6971,8 +6971,8 @@
         </p:nvSpPr>
         <p:spPr>
           <a:xfrm>
-            <a:off x="304495" y="4228312"/>
-            <a:ext cx="1234440" cy="395151"/>
+            <a:off x="304495" y="3833160"/>
+            <a:ext cx="1234440" cy="345757"/>
           </a:xfrm>
           <a:prstGeom prst="rect">
             <a:avLst/>
@@ -7016,8 +7016,8 @@
         </p:nvSpPr>
         <p:spPr>
           <a:xfrm>
-            <a:off x="341071" y="4264888"/>
-            <a:ext cx="1161288" cy="321999"/>
+            <a:off x="341071" y="3869736"/>
+            <a:ext cx="1161288" cy="272605"/>
           </a:xfrm>
           <a:prstGeom prst="rect">
             <a:avLst/>
@@ -7050,8 +7050,8 @@
         </p:nvSpPr>
         <p:spPr>
           <a:xfrm>
-            <a:off x="1538935" y="4228312"/>
-            <a:ext cx="914400" cy="395151"/>
+            <a:off x="1538935" y="3833160"/>
+            <a:ext cx="914400" cy="345757"/>
           </a:xfrm>
           <a:prstGeom prst="rect">
             <a:avLst/>
@@ -7095,8 +7095,8 @@
         </p:nvSpPr>
         <p:spPr>
           <a:xfrm>
-            <a:off x="1575511" y="4264888"/>
-            <a:ext cx="841248" cy="321999"/>
+            <a:off x="1575511" y="3869736"/>
+            <a:ext cx="841248" cy="272605"/>
           </a:xfrm>
           <a:prstGeom prst="rect">
             <a:avLst/>
@@ -7129,8 +7129,8 @@
         </p:nvSpPr>
         <p:spPr>
           <a:xfrm>
-            <a:off x="2453335" y="4228312"/>
-            <a:ext cx="1005840" cy="395151"/>
+            <a:off x="2453335" y="3833160"/>
+            <a:ext cx="1005840" cy="345757"/>
           </a:xfrm>
           <a:prstGeom prst="rect">
             <a:avLst/>
@@ -7174,8 +7174,8 @@
         </p:nvSpPr>
         <p:spPr>
           <a:xfrm>
-            <a:off x="2489911" y="4264888"/>
-            <a:ext cx="932688" cy="321999"/>
+            <a:off x="2489911" y="3869736"/>
+            <a:ext cx="932688" cy="272605"/>
           </a:xfrm>
           <a:prstGeom prst="rect">
             <a:avLst/>
@@ -7208,8 +7208,8 @@
         </p:nvSpPr>
         <p:spPr>
           <a:xfrm>
-            <a:off x="3459175" y="4228312"/>
-            <a:ext cx="1051560" cy="395151"/>
+            <a:off x="3459175" y="3833160"/>
+            <a:ext cx="1051560" cy="345757"/>
           </a:xfrm>
           <a:prstGeom prst="rect">
             <a:avLst/>
@@ -7253,8 +7253,8 @@
         </p:nvSpPr>
         <p:spPr>
           <a:xfrm>
-            <a:off x="3495751" y="4264888"/>
-            <a:ext cx="978408" cy="321999"/>
+            <a:off x="3495751" y="3869736"/>
+            <a:ext cx="978408" cy="272605"/>
           </a:xfrm>
           <a:prstGeom prst="rect">
             <a:avLst/>
@@ -7287,8 +7287,8 @@
         </p:nvSpPr>
         <p:spPr>
           <a:xfrm>
-            <a:off x="4510735" y="4228312"/>
-            <a:ext cx="1234440" cy="395151"/>
+            <a:off x="4510735" y="3833160"/>
+            <a:ext cx="1234440" cy="345757"/>
           </a:xfrm>
           <a:prstGeom prst="rect">
             <a:avLst/>
@@ -7332,8 +7332,8 @@
         </p:nvSpPr>
         <p:spPr>
           <a:xfrm>
-            <a:off x="4547311" y="4264888"/>
-            <a:ext cx="1161288" cy="321999"/>
+            <a:off x="4547311" y="3869736"/>
+            <a:ext cx="1161288" cy="272605"/>
           </a:xfrm>
           <a:prstGeom prst="rect">
             <a:avLst/>
@@ -7366,8 +7366,8 @@
         </p:nvSpPr>
         <p:spPr>
           <a:xfrm>
-            <a:off x="5745175" y="4228312"/>
-            <a:ext cx="1005840" cy="395151"/>
+            <a:off x="5745175" y="3833160"/>
+            <a:ext cx="1005840" cy="345757"/>
           </a:xfrm>
           <a:prstGeom prst="rect">
             <a:avLst/>
@@ -7411,8 +7411,8 @@
         </p:nvSpPr>
         <p:spPr>
           <a:xfrm>
-            <a:off x="5781751" y="4264888"/>
-            <a:ext cx="932688" cy="321999"/>
+            <a:off x="5781751" y="3869736"/>
+            <a:ext cx="932688" cy="272605"/>
           </a:xfrm>
           <a:prstGeom prst="rect">
             <a:avLst/>
@@ -7445,8 +7445,8 @@
         </p:nvSpPr>
         <p:spPr>
           <a:xfrm>
-            <a:off x="6751015" y="4228312"/>
-            <a:ext cx="1783080" cy="395151"/>
+            <a:off x="6751015" y="3833160"/>
+            <a:ext cx="1783080" cy="345757"/>
           </a:xfrm>
           <a:prstGeom prst="rect">
             <a:avLst/>
@@ -7490,8 +7490,8 @@
         </p:nvSpPr>
         <p:spPr>
           <a:xfrm>
-            <a:off x="6787591" y="4264888"/>
-            <a:ext cx="1709928" cy="321999"/>
+            <a:off x="6787591" y="3869736"/>
+            <a:ext cx="1709928" cy="272605"/>
           </a:xfrm>
           <a:prstGeom prst="rect">
             <a:avLst/>
@@ -7524,8 +7524,8 @@
         </p:nvSpPr>
         <p:spPr>
           <a:xfrm>
-            <a:off x="304495" y="4623463"/>
-            <a:ext cx="1234440" cy="395151"/>
+            <a:off x="304495" y="4178917"/>
+            <a:ext cx="1234440" cy="345757"/>
           </a:xfrm>
           <a:prstGeom prst="rect">
             <a:avLst/>
@@ -7569,8 +7569,8 @@
         </p:nvSpPr>
         <p:spPr>
           <a:xfrm>
-            <a:off x="341071" y="4660039"/>
-            <a:ext cx="1161288" cy="321999"/>
+            <a:off x="341071" y="4215493"/>
+            <a:ext cx="1161288" cy="272605"/>
           </a:xfrm>
           <a:prstGeom prst="rect">
             <a:avLst/>
@@ -7603,8 +7603,8 @@
         </p:nvSpPr>
         <p:spPr>
           <a:xfrm>
-            <a:off x="1538935" y="4623463"/>
-            <a:ext cx="914400" cy="395151"/>
+            <a:off x="1538935" y="4178917"/>
+            <a:ext cx="914400" cy="345757"/>
           </a:xfrm>
           <a:prstGeom prst="rect">
             <a:avLst/>
@@ -7648,8 +7648,8 @@
         </p:nvSpPr>
         <p:spPr>
           <a:xfrm>
-            <a:off x="1575511" y="4660039"/>
-            <a:ext cx="841248" cy="321999"/>
+            <a:off x="1575511" y="4215493"/>
+            <a:ext cx="841248" cy="272605"/>
           </a:xfrm>
           <a:prstGeom prst="rect">
             <a:avLst/>
@@ -7682,8 +7682,8 @@
         </p:nvSpPr>
         <p:spPr>
           <a:xfrm>
-            <a:off x="2453335" y="4623463"/>
-            <a:ext cx="1005840" cy="395151"/>
+            <a:off x="2453335" y="4178917"/>
+            <a:ext cx="1005840" cy="345757"/>
           </a:xfrm>
           <a:prstGeom prst="rect">
             <a:avLst/>
@@ -7727,8 +7727,8 @@
         </p:nvSpPr>
         <p:spPr>
           <a:xfrm>
-            <a:off x="2489911" y="4660039"/>
-            <a:ext cx="932688" cy="321999"/>
+            <a:off x="2489911" y="4215493"/>
+            <a:ext cx="932688" cy="272605"/>
           </a:xfrm>
           <a:prstGeom prst="rect">
             <a:avLst/>
@@ -7761,8 +7761,8 @@
         </p:nvSpPr>
         <p:spPr>
           <a:xfrm>
-            <a:off x="3459175" y="4623463"/>
-            <a:ext cx="1051560" cy="395151"/>
+            <a:off x="3459175" y="4178917"/>
+            <a:ext cx="1051560" cy="345757"/>
           </a:xfrm>
           <a:prstGeom prst="rect">
             <a:avLst/>
@@ -7806,8 +7806,8 @@
         </p:nvSpPr>
         <p:spPr>
           <a:xfrm>
-            <a:off x="3495751" y="4660039"/>
-            <a:ext cx="978408" cy="321999"/>
+            <a:off x="3495751" y="4215493"/>
+            <a:ext cx="978408" cy="272605"/>
           </a:xfrm>
           <a:prstGeom prst="rect">
             <a:avLst/>
@@ -7840,8 +7840,8 @@
         </p:nvSpPr>
         <p:spPr>
           <a:xfrm>
-            <a:off x="4510735" y="4623463"/>
-            <a:ext cx="1234440" cy="395151"/>
+            <a:off x="4510735" y="4178917"/>
+            <a:ext cx="1234440" cy="345757"/>
           </a:xfrm>
           <a:prstGeom prst="rect">
             <a:avLst/>
@@ -7885,8 +7885,8 @@
         </p:nvSpPr>
         <p:spPr>
           <a:xfrm>
-            <a:off x="4547311" y="4660039"/>
-            <a:ext cx="1161288" cy="321999"/>
+            <a:off x="4547311" y="4215493"/>
+            <a:ext cx="1161288" cy="272605"/>
           </a:xfrm>
           <a:prstGeom prst="rect">
             <a:avLst/>
@@ -7919,8 +7919,8 @@
         </p:nvSpPr>
         <p:spPr>
           <a:xfrm>
-            <a:off x="5745175" y="4623463"/>
-            <a:ext cx="1005840" cy="395151"/>
+            <a:off x="5745175" y="4178917"/>
+            <a:ext cx="1005840" cy="345757"/>
           </a:xfrm>
           <a:prstGeom prst="rect">
             <a:avLst/>
@@ -7964,8 +7964,8 @@
         </p:nvSpPr>
         <p:spPr>
           <a:xfrm>
-            <a:off x="5781751" y="4660039"/>
-            <a:ext cx="932688" cy="321999"/>
+            <a:off x="5781751" y="4215493"/>
+            <a:ext cx="932688" cy="272605"/>
           </a:xfrm>
           <a:prstGeom prst="rect">
             <a:avLst/>
@@ -7998,8 +7998,8 @@
         </p:nvSpPr>
         <p:spPr>
           <a:xfrm>
-            <a:off x="6751015" y="4623463"/>
-            <a:ext cx="1783080" cy="395151"/>
+            <a:off x="6751015" y="4178917"/>
+            <a:ext cx="1783080" cy="345757"/>
           </a:xfrm>
           <a:prstGeom prst="rect">
             <a:avLst/>
@@ -8043,8 +8043,8 @@
         </p:nvSpPr>
         <p:spPr>
           <a:xfrm>
-            <a:off x="6787591" y="4660039"/>
-            <a:ext cx="1709928" cy="321999"/>
+            <a:off x="6787591" y="4215493"/>
+            <a:ext cx="1709928" cy="272605"/>
           </a:xfrm>
           <a:prstGeom prst="rect">
             <a:avLst/>
@@ -8077,8 +8077,8 @@
         </p:nvSpPr>
         <p:spPr>
           <a:xfrm>
-            <a:off x="304495" y="5018614"/>
-            <a:ext cx="1234440" cy="395151"/>
+            <a:off x="304495" y="4524674"/>
+            <a:ext cx="1234440" cy="345757"/>
           </a:xfrm>
           <a:prstGeom prst="rect">
             <a:avLst/>
@@ -8122,8 +8122,8 @@
         </p:nvSpPr>
         <p:spPr>
           <a:xfrm>
-            <a:off x="341071" y="5055190"/>
-            <a:ext cx="1161288" cy="321999"/>
+            <a:off x="341071" y="4561250"/>
+            <a:ext cx="1161288" cy="272605"/>
           </a:xfrm>
           <a:prstGeom prst="rect">
             <a:avLst/>
@@ -8156,8 +8156,8 @@
         </p:nvSpPr>
         <p:spPr>
           <a:xfrm>
-            <a:off x="1538935" y="5018614"/>
-            <a:ext cx="914400" cy="395151"/>
+            <a:off x="1538935" y="4524674"/>
+            <a:ext cx="914400" cy="345757"/>
           </a:xfrm>
           <a:prstGeom prst="rect">
             <a:avLst/>
@@ -8201,8 +8201,8 @@
         </p:nvSpPr>
         <p:spPr>
           <a:xfrm>
-            <a:off x="1575511" y="5055190"/>
-            <a:ext cx="841248" cy="321999"/>
+            <a:off x="1575511" y="4561250"/>
+            <a:ext cx="841248" cy="272605"/>
           </a:xfrm>
           <a:prstGeom prst="rect">
             <a:avLst/>
@@ -8235,8 +8235,8 @@
         </p:nvSpPr>
         <p:spPr>
           <a:xfrm>
-            <a:off x="2453335" y="5018614"/>
-            <a:ext cx="1005840" cy="395151"/>
+            <a:off x="2453335" y="4524674"/>
+            <a:ext cx="1005840" cy="345757"/>
           </a:xfrm>
           <a:prstGeom prst="rect">
             <a:avLst/>
@@ -8280,8 +8280,8 @@
         </p:nvSpPr>
         <p:spPr>
           <a:xfrm>
-            <a:off x="2489911" y="5055190"/>
-            <a:ext cx="932688" cy="321999"/>
+            <a:off x="2489911" y="4561250"/>
+            <a:ext cx="932688" cy="272605"/>
           </a:xfrm>
           <a:prstGeom prst="rect">
             <a:avLst/>
@@ -8314,8 +8314,8 @@
         </p:nvSpPr>
         <p:spPr>
           <a:xfrm>
-            <a:off x="3459175" y="5018614"/>
-            <a:ext cx="1051560" cy="395151"/>
+            <a:off x="3459175" y="4524674"/>
+            <a:ext cx="1051560" cy="345757"/>
           </a:xfrm>
           <a:prstGeom prst="rect">
             <a:avLst/>
@@ -8359,8 +8359,8 @@
         </p:nvSpPr>
         <p:spPr>
           <a:xfrm>
-            <a:off x="3495751" y="5055190"/>
-            <a:ext cx="978408" cy="321999"/>
+            <a:off x="3495751" y="4561250"/>
+            <a:ext cx="978408" cy="272605"/>
           </a:xfrm>
           <a:prstGeom prst="rect">
             <a:avLst/>
@@ -8393,8 +8393,8 @@
         </p:nvSpPr>
         <p:spPr>
           <a:xfrm>
-            <a:off x="4510735" y="5018614"/>
-            <a:ext cx="1234440" cy="395151"/>
+            <a:off x="4510735" y="4524674"/>
+            <a:ext cx="1234440" cy="345757"/>
           </a:xfrm>
           <a:prstGeom prst="rect">
             <a:avLst/>
@@ -8438,8 +8438,8 @@
         </p:nvSpPr>
         <p:spPr>
           <a:xfrm>
-            <a:off x="4547311" y="5055190"/>
-            <a:ext cx="1161288" cy="321999"/>
+            <a:off x="4547311" y="4561250"/>
+            <a:ext cx="1161288" cy="272605"/>
           </a:xfrm>
           <a:prstGeom prst="rect">
             <a:avLst/>
@@ -8472,8 +8472,8 @@
         </p:nvSpPr>
         <p:spPr>
           <a:xfrm>
-            <a:off x="5745175" y="5018614"/>
-            <a:ext cx="1005840" cy="395151"/>
+            <a:off x="5745175" y="4524674"/>
+            <a:ext cx="1005840" cy="345757"/>
           </a:xfrm>
           <a:prstGeom prst="rect">
             <a:avLst/>
@@ -8517,8 +8517,8 @@
         </p:nvSpPr>
         <p:spPr>
           <a:xfrm>
-            <a:off x="5781751" y="5055190"/>
-            <a:ext cx="932688" cy="321999"/>
+            <a:off x="5781751" y="4561250"/>
+            <a:ext cx="932688" cy="272605"/>
           </a:xfrm>
           <a:prstGeom prst="rect">
             <a:avLst/>
@@ -8551,8 +8551,8 @@
         </p:nvSpPr>
         <p:spPr>
           <a:xfrm>
-            <a:off x="6751015" y="5018614"/>
-            <a:ext cx="1783080" cy="395151"/>
+            <a:off x="6751015" y="4524674"/>
+            <a:ext cx="1783080" cy="345757"/>
           </a:xfrm>
           <a:prstGeom prst="rect">
             <a:avLst/>
@@ -8596,8 +8596,8 @@
         </p:nvSpPr>
         <p:spPr>
           <a:xfrm>
-            <a:off x="6787591" y="5055190"/>
-            <a:ext cx="1709928" cy="321999"/>
+            <a:off x="6787591" y="4561250"/>
+            <a:ext cx="1709928" cy="272605"/>
           </a:xfrm>
           <a:prstGeom prst="rect">
             <a:avLst/>
@@ -8630,8 +8630,8 @@
         </p:nvSpPr>
         <p:spPr>
           <a:xfrm>
-            <a:off x="304495" y="5413765"/>
-            <a:ext cx="1234440" cy="395151"/>
+            <a:off x="304495" y="4870431"/>
+            <a:ext cx="1234440" cy="345757"/>
           </a:xfrm>
           <a:prstGeom prst="rect">
             <a:avLst/>
@@ -8675,8 +8675,8 @@
         </p:nvSpPr>
         <p:spPr>
           <a:xfrm>
-            <a:off x="341071" y="5450341"/>
-            <a:ext cx="1161288" cy="321999"/>
+            <a:off x="341071" y="4907007"/>
+            <a:ext cx="1161288" cy="272605"/>
           </a:xfrm>
           <a:prstGeom prst="rect">
             <a:avLst/>
@@ -8709,8 +8709,8 @@
         </p:nvSpPr>
         <p:spPr>
           <a:xfrm>
-            <a:off x="1538935" y="5413765"/>
-            <a:ext cx="914400" cy="395151"/>
+            <a:off x="1538935" y="4870431"/>
+            <a:ext cx="914400" cy="345757"/>
           </a:xfrm>
           <a:prstGeom prst="rect">
             <a:avLst/>
@@ -8754,8 +8754,8 @@
         </p:nvSpPr>
         <p:spPr>
           <a:xfrm>
-            <a:off x="1575511" y="5450341"/>
-            <a:ext cx="841248" cy="321999"/>
+            <a:off x="1575511" y="4907007"/>
+            <a:ext cx="841248" cy="272605"/>
           </a:xfrm>
           <a:prstGeom prst="rect">
             <a:avLst/>
@@ -8788,8 +8788,8 @@
         </p:nvSpPr>
         <p:spPr>
           <a:xfrm>
-            <a:off x="2453335" y="5413765"/>
-            <a:ext cx="1005840" cy="395151"/>
+            <a:off x="2453335" y="4870431"/>
+            <a:ext cx="1005840" cy="345757"/>
           </a:xfrm>
           <a:prstGeom prst="rect">
             <a:avLst/>
@@ -8833,8 +8833,8 @@
         </p:nvSpPr>
         <p:spPr>
           <a:xfrm>
-            <a:off x="2489911" y="5450341"/>
-            <a:ext cx="932688" cy="321999"/>
+            <a:off x="2489911" y="4907007"/>
+            <a:ext cx="932688" cy="272605"/>
           </a:xfrm>
           <a:prstGeom prst="rect">
             <a:avLst/>
@@ -8867,8 +8867,8 @@
         </p:nvSpPr>
         <p:spPr>
           <a:xfrm>
-            <a:off x="3459175" y="5413765"/>
-            <a:ext cx="1051560" cy="395151"/>
+            <a:off x="3459175" y="4870431"/>
+            <a:ext cx="1051560" cy="345757"/>
           </a:xfrm>
           <a:prstGeom prst="rect">
             <a:avLst/>
@@ -8912,8 +8912,8 @@
         </p:nvSpPr>
         <p:spPr>
           <a:xfrm>
-            <a:off x="3495751" y="5450341"/>
-            <a:ext cx="978408" cy="321999"/>
+            <a:off x="3495751" y="4907007"/>
+            <a:ext cx="978408" cy="272605"/>
           </a:xfrm>
           <a:prstGeom prst="rect">
             <a:avLst/>
@@ -8946,8 +8946,8 @@
         </p:nvSpPr>
         <p:spPr>
           <a:xfrm>
-            <a:off x="4510735" y="5413765"/>
-            <a:ext cx="1234440" cy="395151"/>
+            <a:off x="4510735" y="4870431"/>
+            <a:ext cx="1234440" cy="345757"/>
           </a:xfrm>
           <a:prstGeom prst="rect">
             <a:avLst/>
@@ -8991,8 +8991,8 @@
         </p:nvSpPr>
         <p:spPr>
           <a:xfrm>
-            <a:off x="4547311" y="5450341"/>
-            <a:ext cx="1161288" cy="321999"/>
+            <a:off x="4547311" y="4907007"/>
+            <a:ext cx="1161288" cy="272605"/>
           </a:xfrm>
           <a:prstGeom prst="rect">
             <a:avLst/>
@@ -9025,8 +9025,8 @@
         </p:nvSpPr>
         <p:spPr>
           <a:xfrm>
-            <a:off x="5745175" y="5413765"/>
-            <a:ext cx="1005840" cy="395151"/>
+            <a:off x="5745175" y="4870431"/>
+            <a:ext cx="1005840" cy="345757"/>
           </a:xfrm>
           <a:prstGeom prst="rect">
             <a:avLst/>
@@ -9070,8 +9070,8 @@
         </p:nvSpPr>
         <p:spPr>
           <a:xfrm>
-            <a:off x="5781751" y="5450341"/>
-            <a:ext cx="932688" cy="321999"/>
+            <a:off x="5781751" y="4907007"/>
+            <a:ext cx="932688" cy="272605"/>
           </a:xfrm>
           <a:prstGeom prst="rect">
             <a:avLst/>
@@ -9104,8 +9104,8 @@
         </p:nvSpPr>
         <p:spPr>
           <a:xfrm>
-            <a:off x="6751015" y="5413765"/>
-            <a:ext cx="1783080" cy="395151"/>
+            <a:off x="6751015" y="4870431"/>
+            <a:ext cx="1783080" cy="345757"/>
           </a:xfrm>
           <a:prstGeom prst="rect">
             <a:avLst/>
@@ -9149,8 +9149,8 @@
         </p:nvSpPr>
         <p:spPr>
           <a:xfrm>
-            <a:off x="6787591" y="5450341"/>
-            <a:ext cx="1709928" cy="321999"/>
+            <a:off x="6787591" y="4907007"/>
+            <a:ext cx="1709928" cy="272605"/>
           </a:xfrm>
           <a:prstGeom prst="rect">
             <a:avLst/>
@@ -9183,8 +9183,8 @@
         </p:nvSpPr>
         <p:spPr>
           <a:xfrm>
-            <a:off x="304495" y="5808916"/>
-            <a:ext cx="1234440" cy="395151"/>
+            <a:off x="304495" y="5216188"/>
+            <a:ext cx="1234440" cy="345757"/>
           </a:xfrm>
           <a:prstGeom prst="rect">
             <a:avLst/>
@@ -9228,8 +9228,8 @@
         </p:nvSpPr>
         <p:spPr>
           <a:xfrm>
-            <a:off x="341071" y="5845492"/>
-            <a:ext cx="1161288" cy="321999"/>
+            <a:off x="341071" y="5252764"/>
+            <a:ext cx="1161288" cy="272605"/>
           </a:xfrm>
           <a:prstGeom prst="rect">
             <a:avLst/>
@@ -9262,8 +9262,8 @@
         </p:nvSpPr>
         <p:spPr>
           <a:xfrm>
-            <a:off x="1538935" y="5808916"/>
-            <a:ext cx="914400" cy="395151"/>
+            <a:off x="1538935" y="5216188"/>
+            <a:ext cx="914400" cy="345757"/>
           </a:xfrm>
           <a:prstGeom prst="rect">
             <a:avLst/>
@@ -9307,8 +9307,8 @@
         </p:nvSpPr>
         <p:spPr>
           <a:xfrm>
-            <a:off x="1575511" y="5845492"/>
-            <a:ext cx="841248" cy="321999"/>
+            <a:off x="1575511" y="5252764"/>
+            <a:ext cx="841248" cy="272605"/>
           </a:xfrm>
           <a:prstGeom prst="rect">
             <a:avLst/>
@@ -9341,8 +9341,8 @@
         </p:nvSpPr>
         <p:spPr>
           <a:xfrm>
-            <a:off x="2453335" y="5808916"/>
-            <a:ext cx="1005840" cy="395151"/>
+            <a:off x="2453335" y="5216188"/>
+            <a:ext cx="1005840" cy="345757"/>
           </a:xfrm>
           <a:prstGeom prst="rect">
             <a:avLst/>
@@ -9386,8 +9386,8 @@
         </p:nvSpPr>
         <p:spPr>
           <a:xfrm>
-            <a:off x="2489911" y="5845492"/>
-            <a:ext cx="932688" cy="321999"/>
+            <a:off x="2489911" y="5252764"/>
+            <a:ext cx="932688" cy="272605"/>
           </a:xfrm>
           <a:prstGeom prst="rect">
             <a:avLst/>
@@ -9420,8 +9420,8 @@
         </p:nvSpPr>
         <p:spPr>
           <a:xfrm>
-            <a:off x="3459175" y="5808916"/>
-            <a:ext cx="1051560" cy="395151"/>
+            <a:off x="3459175" y="5216188"/>
+            <a:ext cx="1051560" cy="345757"/>
           </a:xfrm>
           <a:prstGeom prst="rect">
             <a:avLst/>
@@ -9465,8 +9465,8 @@
         </p:nvSpPr>
         <p:spPr>
           <a:xfrm>
-            <a:off x="3495751" y="5845492"/>
-            <a:ext cx="978408" cy="321999"/>
+            <a:off x="3495751" y="5252764"/>
+            <a:ext cx="978408" cy="272605"/>
           </a:xfrm>
           <a:prstGeom prst="rect">
             <a:avLst/>
@@ -9499,8 +9499,8 @@
         </p:nvSpPr>
         <p:spPr>
           <a:xfrm>
-            <a:off x="4510735" y="5808916"/>
-            <a:ext cx="1234440" cy="395151"/>
+            <a:off x="4510735" y="5216188"/>
+            <a:ext cx="1234440" cy="345757"/>
           </a:xfrm>
           <a:prstGeom prst="rect">
             <a:avLst/>
@@ -9544,8 +9544,8 @@
         </p:nvSpPr>
         <p:spPr>
           <a:xfrm>
-            <a:off x="4547311" y="5845492"/>
-            <a:ext cx="1161288" cy="321999"/>
+            <a:off x="4547311" y="5252764"/>
+            <a:ext cx="1161288" cy="272605"/>
           </a:xfrm>
           <a:prstGeom prst="rect">
             <a:avLst/>
@@ -9578,8 +9578,8 @@
         </p:nvSpPr>
         <p:spPr>
           <a:xfrm>
-            <a:off x="5745175" y="5808916"/>
-            <a:ext cx="1005840" cy="395151"/>
+            <a:off x="5745175" y="5216188"/>
+            <a:ext cx="1005840" cy="345757"/>
           </a:xfrm>
           <a:prstGeom prst="rect">
             <a:avLst/>
@@ -9623,8 +9623,8 @@
         </p:nvSpPr>
         <p:spPr>
           <a:xfrm>
-            <a:off x="5781751" y="5845492"/>
-            <a:ext cx="932688" cy="321999"/>
+            <a:off x="5781751" y="5252764"/>
+            <a:ext cx="932688" cy="272605"/>
           </a:xfrm>
           <a:prstGeom prst="rect">
             <a:avLst/>
@@ -9657,8 +9657,8 @@
         </p:nvSpPr>
         <p:spPr>
           <a:xfrm>
-            <a:off x="6751015" y="5808916"/>
-            <a:ext cx="1783080" cy="395151"/>
+            <a:off x="6751015" y="5216188"/>
+            <a:ext cx="1783080" cy="345757"/>
           </a:xfrm>
           <a:prstGeom prst="rect">
             <a:avLst/>
@@ -9702,8 +9702,8 @@
         </p:nvSpPr>
         <p:spPr>
           <a:xfrm>
-            <a:off x="6787591" y="5845492"/>
-            <a:ext cx="1709928" cy="321999"/>
+            <a:off x="6787591" y="5252764"/>
+            <a:ext cx="1709928" cy="272605"/>
           </a:xfrm>
           <a:prstGeom prst="rect">
             <a:avLst/>
@@ -9736,8 +9736,8 @@
         </p:nvSpPr>
         <p:spPr>
           <a:xfrm>
-            <a:off x="304495" y="6204067"/>
-            <a:ext cx="1234440" cy="395151"/>
+            <a:off x="304495" y="5561945"/>
+            <a:ext cx="1234440" cy="345757"/>
           </a:xfrm>
           <a:prstGeom prst="rect">
             <a:avLst/>
@@ -9781,8 +9781,8 @@
         </p:nvSpPr>
         <p:spPr>
           <a:xfrm>
-            <a:off x="341071" y="6240643"/>
-            <a:ext cx="1161288" cy="321999"/>
+            <a:off x="341071" y="5598521"/>
+            <a:ext cx="1161288" cy="272605"/>
           </a:xfrm>
           <a:prstGeom prst="rect">
             <a:avLst/>
@@ -9815,8 +9815,8 @@
         </p:nvSpPr>
         <p:spPr>
           <a:xfrm>
-            <a:off x="1538935" y="6204067"/>
-            <a:ext cx="914400" cy="395151"/>
+            <a:off x="1538935" y="5561945"/>
+            <a:ext cx="914400" cy="345757"/>
           </a:xfrm>
           <a:prstGeom prst="rect">
             <a:avLst/>
@@ -9860,8 +9860,8 @@
         </p:nvSpPr>
         <p:spPr>
           <a:xfrm>
-            <a:off x="1575511" y="6240643"/>
-            <a:ext cx="841248" cy="321999"/>
+            <a:off x="1575511" y="5598521"/>
+            <a:ext cx="841248" cy="272605"/>
           </a:xfrm>
           <a:prstGeom prst="rect">
             <a:avLst/>
@@ -9894,8 +9894,8 @@
         </p:nvSpPr>
         <p:spPr>
           <a:xfrm>
-            <a:off x="2453335" y="6204067"/>
-            <a:ext cx="1005840" cy="395151"/>
+            <a:off x="2453335" y="5561945"/>
+            <a:ext cx="1005840" cy="345757"/>
           </a:xfrm>
           <a:prstGeom prst="rect">
             <a:avLst/>
@@ -9939,8 +9939,8 @@
         </p:nvSpPr>
         <p:spPr>
           <a:xfrm>
-            <a:off x="2489911" y="6240643"/>
-            <a:ext cx="932688" cy="321999"/>
+            <a:off x="2489911" y="5598521"/>
+            <a:ext cx="932688" cy="272605"/>
           </a:xfrm>
           <a:prstGeom prst="rect">
             <a:avLst/>
@@ -9973,8 +9973,8 @@
         </p:nvSpPr>
         <p:spPr>
           <a:xfrm>
-            <a:off x="3459175" y="6204067"/>
-            <a:ext cx="1051560" cy="395151"/>
+            <a:off x="3459175" y="5561945"/>
+            <a:ext cx="1051560" cy="345757"/>
           </a:xfrm>
           <a:prstGeom prst="rect">
             <a:avLst/>
@@ -10018,8 +10018,8 @@
         </p:nvSpPr>
         <p:spPr>
           <a:xfrm>
-            <a:off x="3495751" y="6240643"/>
-            <a:ext cx="978408" cy="321999"/>
+            <a:off x="3495751" y="5598521"/>
+            <a:ext cx="978408" cy="272605"/>
           </a:xfrm>
           <a:prstGeom prst="rect">
             <a:avLst/>
@@ -10052,8 +10052,8 @@
         </p:nvSpPr>
         <p:spPr>
           <a:xfrm>
-            <a:off x="4510735" y="6204067"/>
-            <a:ext cx="1234440" cy="395151"/>
+            <a:off x="4510735" y="5561945"/>
+            <a:ext cx="1234440" cy="345757"/>
           </a:xfrm>
           <a:prstGeom prst="rect">
             <a:avLst/>
@@ -10097,8 +10097,8 @@
         </p:nvSpPr>
         <p:spPr>
           <a:xfrm>
-            <a:off x="4547311" y="6240643"/>
-            <a:ext cx="1161288" cy="321999"/>
+            <a:off x="4547311" y="5598521"/>
+            <a:ext cx="1161288" cy="272605"/>
           </a:xfrm>
           <a:prstGeom prst="rect">
             <a:avLst/>
@@ -10131,8 +10131,8 @@
         </p:nvSpPr>
         <p:spPr>
           <a:xfrm>
-            <a:off x="5745175" y="6204067"/>
-            <a:ext cx="1005840" cy="395151"/>
+            <a:off x="5745175" y="5561945"/>
+            <a:ext cx="1005840" cy="345757"/>
           </a:xfrm>
           <a:prstGeom prst="rect">
             <a:avLst/>
@@ -10176,8 +10176,8 @@
         </p:nvSpPr>
         <p:spPr>
           <a:xfrm>
-            <a:off x="5781751" y="6240643"/>
-            <a:ext cx="932688" cy="321999"/>
+            <a:off x="5781751" y="5598521"/>
+            <a:ext cx="932688" cy="272605"/>
           </a:xfrm>
           <a:prstGeom prst="rect">
             <a:avLst/>
@@ -10210,8 +10210,8 @@
         </p:nvSpPr>
         <p:spPr>
           <a:xfrm>
-            <a:off x="6751015" y="6204067"/>
-            <a:ext cx="1783080" cy="395151"/>
+            <a:off x="6751015" y="5561945"/>
+            <a:ext cx="1783080" cy="345757"/>
           </a:xfrm>
           <a:prstGeom prst="rect">
             <a:avLst/>
@@ -10255,8 +10255,8 @@
         </p:nvSpPr>
         <p:spPr>
           <a:xfrm>
-            <a:off x="6787591" y="6240643"/>
-            <a:ext cx="1709928" cy="321999"/>
+            <a:off x="6787591" y="5598521"/>
+            <a:ext cx="1709928" cy="272605"/>
           </a:xfrm>
           <a:prstGeom prst="rect">
             <a:avLst/>
@@ -10277,6 +10277,1112 @@
                 </a:solidFill>
               </a:rPr>
               <a:t>（接触不良修正後）</a:t>
+            </a:r>
+          </a:p>
+        </p:txBody>
+      </p:sp>
+      <p:sp>
+        <p:nvSpPr>
+          <p:cNvPr id="200" name="Rectangle 199"/>
+          <p:cNvSpPr/>
+          <p:nvPr/>
+        </p:nvSpPr>
+        <p:spPr>
+          <a:xfrm>
+            <a:off x="304495" y="5907702"/>
+            <a:ext cx="1234440" cy="345757"/>
+          </a:xfrm>
+          <a:prstGeom prst="rect">
+            <a:avLst/>
+          </a:prstGeom>
+          <a:solidFill>
+            <a:srgbClr val="DDF5E8"/>
+          </a:solidFill>
+          <a:ln w="6350">
+            <a:solidFill>
+              <a:srgbClr val="CCCCCC"/>
+            </a:solidFill>
+          </a:ln>
+        </p:spPr>
+        <p:style>
+          <a:lnRef idx="1">
+            <a:schemeClr val="accent1"/>
+          </a:lnRef>
+          <a:fillRef idx="3">
+            <a:schemeClr val="accent1"/>
+          </a:fillRef>
+          <a:effectRef idx="2">
+            <a:schemeClr val="accent1"/>
+          </a:effectRef>
+          <a:fontRef idx="minor">
+            <a:schemeClr val="lt1"/>
+          </a:fontRef>
+        </p:style>
+        <p:txBody>
+          <a:bodyPr rtlCol="0" anchor="ctr"/>
+          <a:lstStyle/>
+          <a:p>
+            <a:pPr algn="ctr"/>
+          </a:p>
+        </p:txBody>
+      </p:sp>
+      <p:sp>
+        <p:nvSpPr>
+          <p:cNvPr id="201" name="TextBox 200"/>
+          <p:cNvSpPr txBox="1"/>
+          <p:nvPr/>
+        </p:nvSpPr>
+        <p:spPr>
+          <a:xfrm>
+            <a:off x="341071" y="5944278"/>
+            <a:ext cx="1161288" cy="272605"/>
+          </a:xfrm>
+          <a:prstGeom prst="rect">
+            <a:avLst/>
+          </a:prstGeom>
+          <a:noFill/>
+        </p:spPr>
+        <p:txBody>
+          <a:bodyPr wrap="square">
+            <a:normAutofit/>
+          </a:bodyPr>
+          <a:lstStyle/>
+          <a:p>
+            <a:pPr algn="ctr"/>
+            <a:r>
+              <a:rPr sz="1000" b="0">
+                <a:solidFill>
+                  <a:srgbClr val="1A1A2E"/>
+                </a:solidFill>
+              </a:rPr>
+              <a:t>260611</a:t>
+            </a:r>
+          </a:p>
+        </p:txBody>
+      </p:sp>
+      <p:sp>
+        <p:nvSpPr>
+          <p:cNvPr id="202" name="Rectangle 201"/>
+          <p:cNvSpPr/>
+          <p:nvPr/>
+        </p:nvSpPr>
+        <p:spPr>
+          <a:xfrm>
+            <a:off x="1538935" y="5907702"/>
+            <a:ext cx="914400" cy="345757"/>
+          </a:xfrm>
+          <a:prstGeom prst="rect">
+            <a:avLst/>
+          </a:prstGeom>
+          <a:solidFill>
+            <a:srgbClr val="DDF5E8"/>
+          </a:solidFill>
+          <a:ln w="6350">
+            <a:solidFill>
+              <a:srgbClr val="CCCCCC"/>
+            </a:solidFill>
+          </a:ln>
+        </p:spPr>
+        <p:style>
+          <a:lnRef idx="1">
+            <a:schemeClr val="accent1"/>
+          </a:lnRef>
+          <a:fillRef idx="3">
+            <a:schemeClr val="accent1"/>
+          </a:fillRef>
+          <a:effectRef idx="2">
+            <a:schemeClr val="accent1"/>
+          </a:effectRef>
+          <a:fontRef idx="minor">
+            <a:schemeClr val="lt1"/>
+          </a:fontRef>
+        </p:style>
+        <p:txBody>
+          <a:bodyPr rtlCol="0" anchor="ctr"/>
+          <a:lstStyle/>
+          <a:p>
+            <a:pPr algn="ctr"/>
+          </a:p>
+        </p:txBody>
+      </p:sp>
+      <p:sp>
+        <p:nvSpPr>
+          <p:cNvPr id="203" name="TextBox 202"/>
+          <p:cNvSpPr txBox="1"/>
+          <p:nvPr/>
+        </p:nvSpPr>
+        <p:spPr>
+          <a:xfrm>
+            <a:off x="1575511" y="5944278"/>
+            <a:ext cx="841248" cy="272605"/>
+          </a:xfrm>
+          <a:prstGeom prst="rect">
+            <a:avLst/>
+          </a:prstGeom>
+          <a:noFill/>
+        </p:spPr>
+        <p:txBody>
+          <a:bodyPr wrap="square">
+            <a:normAutofit/>
+          </a:bodyPr>
+          <a:lstStyle/>
+          <a:p>
+            <a:pPr algn="ctr"/>
+            <a:r>
+              <a:rPr sz="1000" b="0">
+                <a:solidFill>
+                  <a:srgbClr val="1A1A2E"/>
+                </a:solidFill>
+              </a:rPr>
+              <a:t>2026-06-11</a:t>
+            </a:r>
+          </a:p>
+        </p:txBody>
+      </p:sp>
+      <p:sp>
+        <p:nvSpPr>
+          <p:cNvPr id="204" name="Rectangle 203"/>
+          <p:cNvSpPr/>
+          <p:nvPr/>
+        </p:nvSpPr>
+        <p:spPr>
+          <a:xfrm>
+            <a:off x="2453335" y="5907702"/>
+            <a:ext cx="1005840" cy="345757"/>
+          </a:xfrm>
+          <a:prstGeom prst="rect">
+            <a:avLst/>
+          </a:prstGeom>
+          <a:solidFill>
+            <a:srgbClr val="DDF5E8"/>
+          </a:solidFill>
+          <a:ln w="6350">
+            <a:solidFill>
+              <a:srgbClr val="CCCCCC"/>
+            </a:solidFill>
+          </a:ln>
+        </p:spPr>
+        <p:style>
+          <a:lnRef idx="1">
+            <a:schemeClr val="accent1"/>
+          </a:lnRef>
+          <a:fillRef idx="3">
+            <a:schemeClr val="accent1"/>
+          </a:fillRef>
+          <a:effectRef idx="2">
+            <a:schemeClr val="accent1"/>
+          </a:effectRef>
+          <a:fontRef idx="minor">
+            <a:schemeClr val="lt1"/>
+          </a:fontRef>
+        </p:style>
+        <p:txBody>
+          <a:bodyPr rtlCol="0" anchor="ctr"/>
+          <a:lstStyle/>
+          <a:p>
+            <a:pPr algn="ctr"/>
+          </a:p>
+        </p:txBody>
+      </p:sp>
+      <p:sp>
+        <p:nvSpPr>
+          <p:cNvPr id="205" name="TextBox 204"/>
+          <p:cNvSpPr txBox="1"/>
+          <p:nvPr/>
+        </p:nvSpPr>
+        <p:spPr>
+          <a:xfrm>
+            <a:off x="2489911" y="5944278"/>
+            <a:ext cx="932688" cy="272605"/>
+          </a:xfrm>
+          <a:prstGeom prst="rect">
+            <a:avLst/>
+          </a:prstGeom>
+          <a:noFill/>
+        </p:spPr>
+        <p:txBody>
+          <a:bodyPr wrap="square">
+            <a:normAutofit/>
+          </a:bodyPr>
+          <a:lstStyle/>
+          <a:p>
+            <a:pPr algn="ctr"/>
+            <a:r>
+              <a:rPr sz="1000" b="0">
+                <a:solidFill>
+                  <a:srgbClr val="1A1A2E"/>
+                </a:solidFill>
+              </a:rPr>
+              <a:t>-0.0448</a:t>
+            </a:r>
+          </a:p>
+        </p:txBody>
+      </p:sp>
+      <p:sp>
+        <p:nvSpPr>
+          <p:cNvPr id="206" name="Rectangle 205"/>
+          <p:cNvSpPr/>
+          <p:nvPr/>
+        </p:nvSpPr>
+        <p:spPr>
+          <a:xfrm>
+            <a:off x="3459175" y="5907702"/>
+            <a:ext cx="1051560" cy="345757"/>
+          </a:xfrm>
+          <a:prstGeom prst="rect">
+            <a:avLst/>
+          </a:prstGeom>
+          <a:solidFill>
+            <a:srgbClr val="DDF5E8"/>
+          </a:solidFill>
+          <a:ln w="6350">
+            <a:solidFill>
+              <a:srgbClr val="CCCCCC"/>
+            </a:solidFill>
+          </a:ln>
+        </p:spPr>
+        <p:style>
+          <a:lnRef idx="1">
+            <a:schemeClr val="accent1"/>
+          </a:lnRef>
+          <a:fillRef idx="3">
+            <a:schemeClr val="accent1"/>
+          </a:fillRef>
+          <a:effectRef idx="2">
+            <a:schemeClr val="accent1"/>
+          </a:effectRef>
+          <a:fontRef idx="minor">
+            <a:schemeClr val="lt1"/>
+          </a:fontRef>
+        </p:style>
+        <p:txBody>
+          <a:bodyPr rtlCol="0" anchor="ctr"/>
+          <a:lstStyle/>
+          <a:p>
+            <a:pPr algn="ctr"/>
+          </a:p>
+        </p:txBody>
+      </p:sp>
+      <p:sp>
+        <p:nvSpPr>
+          <p:cNvPr id="207" name="TextBox 206"/>
+          <p:cNvSpPr txBox="1"/>
+          <p:nvPr/>
+        </p:nvSpPr>
+        <p:spPr>
+          <a:xfrm>
+            <a:off x="3495751" y="5944278"/>
+            <a:ext cx="978408" cy="272605"/>
+          </a:xfrm>
+          <a:prstGeom prst="rect">
+            <a:avLst/>
+          </a:prstGeom>
+          <a:noFill/>
+        </p:spPr>
+        <p:txBody>
+          <a:bodyPr wrap="square">
+            <a:normAutofit/>
+          </a:bodyPr>
+          <a:lstStyle/>
+          <a:p>
+            <a:pPr algn="ctr"/>
+            <a:r>
+              <a:rPr sz="1000" b="0">
+                <a:solidFill>
+                  <a:srgbClr val="1A1A2E"/>
+                </a:solidFill>
+              </a:rPr>
+              <a:t>0.797°</a:t>
+            </a:r>
+          </a:p>
+        </p:txBody>
+      </p:sp>
+      <p:sp>
+        <p:nvSpPr>
+          <p:cNvPr id="208" name="Rectangle 207"/>
+          <p:cNvSpPr/>
+          <p:nvPr/>
+        </p:nvSpPr>
+        <p:spPr>
+          <a:xfrm>
+            <a:off x="4510735" y="5907702"/>
+            <a:ext cx="1234440" cy="345757"/>
+          </a:xfrm>
+          <a:prstGeom prst="rect">
+            <a:avLst/>
+          </a:prstGeom>
+          <a:solidFill>
+            <a:srgbClr val="DDF5E8"/>
+          </a:solidFill>
+          <a:ln w="6350">
+            <a:solidFill>
+              <a:srgbClr val="CCCCCC"/>
+            </a:solidFill>
+          </a:ln>
+        </p:spPr>
+        <p:style>
+          <a:lnRef idx="1">
+            <a:schemeClr val="accent1"/>
+          </a:lnRef>
+          <a:fillRef idx="3">
+            <a:schemeClr val="accent1"/>
+          </a:fillRef>
+          <a:effectRef idx="2">
+            <a:schemeClr val="accent1"/>
+          </a:effectRef>
+          <a:fontRef idx="minor">
+            <a:schemeClr val="lt1"/>
+          </a:fontRef>
+        </p:style>
+        <p:txBody>
+          <a:bodyPr rtlCol="0" anchor="ctr"/>
+          <a:lstStyle/>
+          <a:p>
+            <a:pPr algn="ctr"/>
+          </a:p>
+        </p:txBody>
+      </p:sp>
+      <p:sp>
+        <p:nvSpPr>
+          <p:cNvPr id="209" name="TextBox 208"/>
+          <p:cNvSpPr txBox="1"/>
+          <p:nvPr/>
+        </p:nvSpPr>
+        <p:spPr>
+          <a:xfrm>
+            <a:off x="4547311" y="5944278"/>
+            <a:ext cx="1161288" cy="272605"/>
+          </a:xfrm>
+          <a:prstGeom prst="rect">
+            <a:avLst/>
+          </a:prstGeom>
+          <a:noFill/>
+        </p:spPr>
+        <p:txBody>
+          <a:bodyPr wrap="square">
+            <a:normAutofit/>
+          </a:bodyPr>
+          <a:lstStyle/>
+          <a:p>
+            <a:pPr algn="ctr"/>
+            <a:r>
+              <a:rPr sz="1000" b="0">
+                <a:solidFill>
+                  <a:srgbClr val="1A1A2E"/>
+                </a:solidFill>
+              </a:rPr>
+              <a:t>0.1151</a:t>
+            </a:r>
+          </a:p>
+        </p:txBody>
+      </p:sp>
+      <p:sp>
+        <p:nvSpPr>
+          <p:cNvPr id="210" name="Rectangle 209"/>
+          <p:cNvSpPr/>
+          <p:nvPr/>
+        </p:nvSpPr>
+        <p:spPr>
+          <a:xfrm>
+            <a:off x="5745175" y="5907702"/>
+            <a:ext cx="1005840" cy="345757"/>
+          </a:xfrm>
+          <a:prstGeom prst="rect">
+            <a:avLst/>
+          </a:prstGeom>
+          <a:solidFill>
+            <a:srgbClr val="DDF5E8"/>
+          </a:solidFill>
+          <a:ln w="6350">
+            <a:solidFill>
+              <a:srgbClr val="CCCCCC"/>
+            </a:solidFill>
+          </a:ln>
+        </p:spPr>
+        <p:style>
+          <a:lnRef idx="1">
+            <a:schemeClr val="accent1"/>
+          </a:lnRef>
+          <a:fillRef idx="3">
+            <a:schemeClr val="accent1"/>
+          </a:fillRef>
+          <a:effectRef idx="2">
+            <a:schemeClr val="accent1"/>
+          </a:effectRef>
+          <a:fontRef idx="minor">
+            <a:schemeClr val="lt1"/>
+          </a:fontRef>
+        </p:style>
+        <p:txBody>
+          <a:bodyPr rtlCol="0" anchor="ctr"/>
+          <a:lstStyle/>
+          <a:p>
+            <a:pPr algn="ctr"/>
+          </a:p>
+        </p:txBody>
+      </p:sp>
+      <p:sp>
+        <p:nvSpPr>
+          <p:cNvPr id="211" name="TextBox 210"/>
+          <p:cNvSpPr txBox="1"/>
+          <p:nvPr/>
+        </p:nvSpPr>
+        <p:spPr>
+          <a:xfrm>
+            <a:off x="5781751" y="5944278"/>
+            <a:ext cx="932688" cy="272605"/>
+          </a:xfrm>
+          <a:prstGeom prst="rect">
+            <a:avLst/>
+          </a:prstGeom>
+          <a:noFill/>
+        </p:spPr>
+        <p:txBody>
+          <a:bodyPr wrap="square">
+            <a:normAutofit/>
+          </a:bodyPr>
+          <a:lstStyle/>
+          <a:p>
+            <a:pPr algn="ctr"/>
+            <a:r>
+              <a:rPr sz="1000" b="0">
+                <a:solidFill>
+                  <a:srgbClr val="1A1A2E"/>
+                </a:solidFill>
+              </a:rPr>
+              <a:t>0.087</a:t>
+            </a:r>
+          </a:p>
+        </p:txBody>
+      </p:sp>
+      <p:sp>
+        <p:nvSpPr>
+          <p:cNvPr id="212" name="Rectangle 211"/>
+          <p:cNvSpPr/>
+          <p:nvPr/>
+        </p:nvSpPr>
+        <p:spPr>
+          <a:xfrm>
+            <a:off x="6751015" y="5907702"/>
+            <a:ext cx="1783080" cy="345757"/>
+          </a:xfrm>
+          <a:prstGeom prst="rect">
+            <a:avLst/>
+          </a:prstGeom>
+          <a:solidFill>
+            <a:srgbClr val="DDF5E8"/>
+          </a:solidFill>
+          <a:ln w="6350">
+            <a:solidFill>
+              <a:srgbClr val="CCCCCC"/>
+            </a:solidFill>
+          </a:ln>
+        </p:spPr>
+        <p:style>
+          <a:lnRef idx="1">
+            <a:schemeClr val="accent1"/>
+          </a:lnRef>
+          <a:fillRef idx="3">
+            <a:schemeClr val="accent1"/>
+          </a:fillRef>
+          <a:effectRef idx="2">
+            <a:schemeClr val="accent1"/>
+          </a:effectRef>
+          <a:fontRef idx="minor">
+            <a:schemeClr val="lt1"/>
+          </a:fontRef>
+        </p:style>
+        <p:txBody>
+          <a:bodyPr rtlCol="0" anchor="ctr"/>
+          <a:lstStyle/>
+          <a:p>
+            <a:pPr algn="ctr"/>
+          </a:p>
+        </p:txBody>
+      </p:sp>
+      <p:sp>
+        <p:nvSpPr>
+          <p:cNvPr id="213" name="TextBox 212"/>
+          <p:cNvSpPr txBox="1"/>
+          <p:nvPr/>
+        </p:nvSpPr>
+        <p:spPr>
+          <a:xfrm>
+            <a:off x="6787591" y="5944278"/>
+            <a:ext cx="1709928" cy="272605"/>
+          </a:xfrm>
+          <a:prstGeom prst="rect">
+            <a:avLst/>
+          </a:prstGeom>
+          <a:noFill/>
+        </p:spPr>
+        <p:txBody>
+          <a:bodyPr wrap="square">
+            <a:normAutofit/>
+          </a:bodyPr>
+          <a:lstStyle/>
+          <a:p>
+            <a:pPr algn="ctr"/>
+            <a:r>
+              <a:rPr sz="900" b="0">
+                <a:solidFill>
+                  <a:srgbClr val="1A1A2E"/>
+                </a:solidFill>
+              </a:rPr>
+              <a:t>（新システム・新規）</a:t>
+            </a:r>
+          </a:p>
+        </p:txBody>
+      </p:sp>
+      <p:sp>
+        <p:nvSpPr>
+          <p:cNvPr id="214" name="Rectangle 213"/>
+          <p:cNvSpPr/>
+          <p:nvPr/>
+        </p:nvSpPr>
+        <p:spPr>
+          <a:xfrm>
+            <a:off x="304495" y="6253459"/>
+            <a:ext cx="1234440" cy="345757"/>
+          </a:xfrm>
+          <a:prstGeom prst="rect">
+            <a:avLst/>
+          </a:prstGeom>
+          <a:solidFill>
+            <a:srgbClr val="DDF5E8"/>
+          </a:solidFill>
+          <a:ln w="6350">
+            <a:solidFill>
+              <a:srgbClr val="CCCCCC"/>
+            </a:solidFill>
+          </a:ln>
+        </p:spPr>
+        <p:style>
+          <a:lnRef idx="1">
+            <a:schemeClr val="accent1"/>
+          </a:lnRef>
+          <a:fillRef idx="3">
+            <a:schemeClr val="accent1"/>
+          </a:fillRef>
+          <a:effectRef idx="2">
+            <a:schemeClr val="accent1"/>
+          </a:effectRef>
+          <a:fontRef idx="minor">
+            <a:schemeClr val="lt1"/>
+          </a:fontRef>
+        </p:style>
+        <p:txBody>
+          <a:bodyPr rtlCol="0" anchor="ctr"/>
+          <a:lstStyle/>
+          <a:p>
+            <a:pPr algn="ctr"/>
+          </a:p>
+        </p:txBody>
+      </p:sp>
+      <p:sp>
+        <p:nvSpPr>
+          <p:cNvPr id="215" name="TextBox 214"/>
+          <p:cNvSpPr txBox="1"/>
+          <p:nvPr/>
+        </p:nvSpPr>
+        <p:spPr>
+          <a:xfrm>
+            <a:off x="341071" y="6290035"/>
+            <a:ext cx="1161288" cy="272605"/>
+          </a:xfrm>
+          <a:prstGeom prst="rect">
+            <a:avLst/>
+          </a:prstGeom>
+          <a:noFill/>
+        </p:spPr>
+        <p:txBody>
+          <a:bodyPr wrap="square">
+            <a:normAutofit/>
+          </a:bodyPr>
+          <a:lstStyle/>
+          <a:p>
+            <a:pPr algn="ctr"/>
+            <a:r>
+              <a:rPr sz="1000" b="0">
+                <a:solidFill>
+                  <a:srgbClr val="1A1A2E"/>
+                </a:solidFill>
+              </a:rPr>
+              <a:t>2606112</a:t>
+            </a:r>
+          </a:p>
+        </p:txBody>
+      </p:sp>
+      <p:sp>
+        <p:nvSpPr>
+          <p:cNvPr id="216" name="Rectangle 215"/>
+          <p:cNvSpPr/>
+          <p:nvPr/>
+        </p:nvSpPr>
+        <p:spPr>
+          <a:xfrm>
+            <a:off x="1538935" y="6253459"/>
+            <a:ext cx="914400" cy="345757"/>
+          </a:xfrm>
+          <a:prstGeom prst="rect">
+            <a:avLst/>
+          </a:prstGeom>
+          <a:solidFill>
+            <a:srgbClr val="DDF5E8"/>
+          </a:solidFill>
+          <a:ln w="6350">
+            <a:solidFill>
+              <a:srgbClr val="CCCCCC"/>
+            </a:solidFill>
+          </a:ln>
+        </p:spPr>
+        <p:style>
+          <a:lnRef idx="1">
+            <a:schemeClr val="accent1"/>
+          </a:lnRef>
+          <a:fillRef idx="3">
+            <a:schemeClr val="accent1"/>
+          </a:fillRef>
+          <a:effectRef idx="2">
+            <a:schemeClr val="accent1"/>
+          </a:effectRef>
+          <a:fontRef idx="minor">
+            <a:schemeClr val="lt1"/>
+          </a:fontRef>
+        </p:style>
+        <p:txBody>
+          <a:bodyPr rtlCol="0" anchor="ctr"/>
+          <a:lstStyle/>
+          <a:p>
+            <a:pPr algn="ctr"/>
+          </a:p>
+        </p:txBody>
+      </p:sp>
+      <p:sp>
+        <p:nvSpPr>
+          <p:cNvPr id="217" name="TextBox 216"/>
+          <p:cNvSpPr txBox="1"/>
+          <p:nvPr/>
+        </p:nvSpPr>
+        <p:spPr>
+          <a:xfrm>
+            <a:off x="1575511" y="6290035"/>
+            <a:ext cx="841248" cy="272605"/>
+          </a:xfrm>
+          <a:prstGeom prst="rect">
+            <a:avLst/>
+          </a:prstGeom>
+          <a:noFill/>
+        </p:spPr>
+        <p:txBody>
+          <a:bodyPr wrap="square">
+            <a:normAutofit/>
+          </a:bodyPr>
+          <a:lstStyle/>
+          <a:p>
+            <a:pPr algn="ctr"/>
+            <a:r>
+              <a:rPr sz="1000" b="0">
+                <a:solidFill>
+                  <a:srgbClr val="1A1A2E"/>
+                </a:solidFill>
+              </a:rPr>
+              <a:t>2026-06-11</a:t>
+            </a:r>
+          </a:p>
+        </p:txBody>
+      </p:sp>
+      <p:sp>
+        <p:nvSpPr>
+          <p:cNvPr id="218" name="Rectangle 217"/>
+          <p:cNvSpPr/>
+          <p:nvPr/>
+        </p:nvSpPr>
+        <p:spPr>
+          <a:xfrm>
+            <a:off x="2453335" y="6253459"/>
+            <a:ext cx="1005840" cy="345757"/>
+          </a:xfrm>
+          <a:prstGeom prst="rect">
+            <a:avLst/>
+          </a:prstGeom>
+          <a:solidFill>
+            <a:srgbClr val="DDF5E8"/>
+          </a:solidFill>
+          <a:ln w="6350">
+            <a:solidFill>
+              <a:srgbClr val="CCCCCC"/>
+            </a:solidFill>
+          </a:ln>
+        </p:spPr>
+        <p:style>
+          <a:lnRef idx="1">
+            <a:schemeClr val="accent1"/>
+          </a:lnRef>
+          <a:fillRef idx="3">
+            <a:schemeClr val="accent1"/>
+          </a:fillRef>
+          <a:effectRef idx="2">
+            <a:schemeClr val="accent1"/>
+          </a:effectRef>
+          <a:fontRef idx="minor">
+            <a:schemeClr val="lt1"/>
+          </a:fontRef>
+        </p:style>
+        <p:txBody>
+          <a:bodyPr rtlCol="0" anchor="ctr"/>
+          <a:lstStyle/>
+          <a:p>
+            <a:pPr algn="ctr"/>
+          </a:p>
+        </p:txBody>
+      </p:sp>
+      <p:sp>
+        <p:nvSpPr>
+          <p:cNvPr id="219" name="TextBox 218"/>
+          <p:cNvSpPr txBox="1"/>
+          <p:nvPr/>
+        </p:nvSpPr>
+        <p:spPr>
+          <a:xfrm>
+            <a:off x="2489911" y="6290035"/>
+            <a:ext cx="932688" cy="272605"/>
+          </a:xfrm>
+          <a:prstGeom prst="rect">
+            <a:avLst/>
+          </a:prstGeom>
+          <a:noFill/>
+        </p:spPr>
+        <p:txBody>
+          <a:bodyPr wrap="square">
+            <a:normAutofit/>
+          </a:bodyPr>
+          <a:lstStyle/>
+          <a:p>
+            <a:pPr algn="ctr"/>
+            <a:r>
+              <a:rPr sz="1000" b="0">
+                <a:solidFill>
+                  <a:srgbClr val="1A1A2E"/>
+                </a:solidFill>
+              </a:rPr>
+              <a:t>-0.0407</a:t>
+            </a:r>
+          </a:p>
+        </p:txBody>
+      </p:sp>
+      <p:sp>
+        <p:nvSpPr>
+          <p:cNvPr id="220" name="Rectangle 219"/>
+          <p:cNvSpPr/>
+          <p:nvPr/>
+        </p:nvSpPr>
+        <p:spPr>
+          <a:xfrm>
+            <a:off x="3459175" y="6253459"/>
+            <a:ext cx="1051560" cy="345757"/>
+          </a:xfrm>
+          <a:prstGeom prst="rect">
+            <a:avLst/>
+          </a:prstGeom>
+          <a:solidFill>
+            <a:srgbClr val="DDF5E8"/>
+          </a:solidFill>
+          <a:ln w="6350">
+            <a:solidFill>
+              <a:srgbClr val="CCCCCC"/>
+            </a:solidFill>
+          </a:ln>
+        </p:spPr>
+        <p:style>
+          <a:lnRef idx="1">
+            <a:schemeClr val="accent1"/>
+          </a:lnRef>
+          <a:fillRef idx="3">
+            <a:schemeClr val="accent1"/>
+          </a:fillRef>
+          <a:effectRef idx="2">
+            <a:schemeClr val="accent1"/>
+          </a:effectRef>
+          <a:fontRef idx="minor">
+            <a:schemeClr val="lt1"/>
+          </a:fontRef>
+        </p:style>
+        <p:txBody>
+          <a:bodyPr rtlCol="0" anchor="ctr"/>
+          <a:lstStyle/>
+          <a:p>
+            <a:pPr algn="ctr"/>
+          </a:p>
+        </p:txBody>
+      </p:sp>
+      <p:sp>
+        <p:nvSpPr>
+          <p:cNvPr id="221" name="TextBox 220"/>
+          <p:cNvSpPr txBox="1"/>
+          <p:nvPr/>
+        </p:nvSpPr>
+        <p:spPr>
+          <a:xfrm>
+            <a:off x="3495751" y="6290035"/>
+            <a:ext cx="978408" cy="272605"/>
+          </a:xfrm>
+          <a:prstGeom prst="rect">
+            <a:avLst/>
+          </a:prstGeom>
+          <a:noFill/>
+        </p:spPr>
+        <p:txBody>
+          <a:bodyPr wrap="square">
+            <a:normAutofit/>
+          </a:bodyPr>
+          <a:lstStyle/>
+          <a:p>
+            <a:pPr algn="ctr"/>
+            <a:r>
+              <a:rPr sz="1000" b="0">
+                <a:solidFill>
+                  <a:srgbClr val="1A1A2E"/>
+                </a:solidFill>
+              </a:rPr>
+              <a:t>0.609°</a:t>
+            </a:r>
+          </a:p>
+        </p:txBody>
+      </p:sp>
+      <p:sp>
+        <p:nvSpPr>
+          <p:cNvPr id="222" name="Rectangle 221"/>
+          <p:cNvSpPr/>
+          <p:nvPr/>
+        </p:nvSpPr>
+        <p:spPr>
+          <a:xfrm>
+            <a:off x="4510735" y="6253459"/>
+            <a:ext cx="1234440" cy="345757"/>
+          </a:xfrm>
+          <a:prstGeom prst="rect">
+            <a:avLst/>
+          </a:prstGeom>
+          <a:solidFill>
+            <a:srgbClr val="DDF5E8"/>
+          </a:solidFill>
+          <a:ln w="6350">
+            <a:solidFill>
+              <a:srgbClr val="CCCCCC"/>
+            </a:solidFill>
+          </a:ln>
+        </p:spPr>
+        <p:style>
+          <a:lnRef idx="1">
+            <a:schemeClr val="accent1"/>
+          </a:lnRef>
+          <a:fillRef idx="3">
+            <a:schemeClr val="accent1"/>
+          </a:fillRef>
+          <a:effectRef idx="2">
+            <a:schemeClr val="accent1"/>
+          </a:effectRef>
+          <a:fontRef idx="minor">
+            <a:schemeClr val="lt1"/>
+          </a:fontRef>
+        </p:style>
+        <p:txBody>
+          <a:bodyPr rtlCol="0" anchor="ctr"/>
+          <a:lstStyle/>
+          <a:p>
+            <a:pPr algn="ctr"/>
+          </a:p>
+        </p:txBody>
+      </p:sp>
+      <p:sp>
+        <p:nvSpPr>
+          <p:cNvPr id="223" name="TextBox 222"/>
+          <p:cNvSpPr txBox="1"/>
+          <p:nvPr/>
+        </p:nvSpPr>
+        <p:spPr>
+          <a:xfrm>
+            <a:off x="4547311" y="6290035"/>
+            <a:ext cx="1161288" cy="272605"/>
+          </a:xfrm>
+          <a:prstGeom prst="rect">
+            <a:avLst/>
+          </a:prstGeom>
+          <a:noFill/>
+        </p:spPr>
+        <p:txBody>
+          <a:bodyPr wrap="square">
+            <a:normAutofit/>
+          </a:bodyPr>
+          <a:lstStyle/>
+          <a:p>
+            <a:pPr algn="ctr"/>
+            <a:r>
+              <a:rPr sz="1000" b="0">
+                <a:solidFill>
+                  <a:srgbClr val="1A1A2E"/>
+                </a:solidFill>
+              </a:rPr>
+              <a:t>0.1127</a:t>
+            </a:r>
+          </a:p>
+        </p:txBody>
+      </p:sp>
+      <p:sp>
+        <p:nvSpPr>
+          <p:cNvPr id="224" name="Rectangle 223"/>
+          <p:cNvSpPr/>
+          <p:nvPr/>
+        </p:nvSpPr>
+        <p:spPr>
+          <a:xfrm>
+            <a:off x="5745175" y="6253459"/>
+            <a:ext cx="1005840" cy="345757"/>
+          </a:xfrm>
+          <a:prstGeom prst="rect">
+            <a:avLst/>
+          </a:prstGeom>
+          <a:solidFill>
+            <a:srgbClr val="DDF5E8"/>
+          </a:solidFill>
+          <a:ln w="6350">
+            <a:solidFill>
+              <a:srgbClr val="CCCCCC"/>
+            </a:solidFill>
+          </a:ln>
+        </p:spPr>
+        <p:style>
+          <a:lnRef idx="1">
+            <a:schemeClr val="accent1"/>
+          </a:lnRef>
+          <a:fillRef idx="3">
+            <a:schemeClr val="accent1"/>
+          </a:fillRef>
+          <a:effectRef idx="2">
+            <a:schemeClr val="accent1"/>
+          </a:effectRef>
+          <a:fontRef idx="minor">
+            <a:schemeClr val="lt1"/>
+          </a:fontRef>
+        </p:style>
+        <p:txBody>
+          <a:bodyPr rtlCol="0" anchor="ctr"/>
+          <a:lstStyle/>
+          <a:p>
+            <a:pPr algn="ctr"/>
+          </a:p>
+        </p:txBody>
+      </p:sp>
+      <p:sp>
+        <p:nvSpPr>
+          <p:cNvPr id="225" name="TextBox 224"/>
+          <p:cNvSpPr txBox="1"/>
+          <p:nvPr/>
+        </p:nvSpPr>
+        <p:spPr>
+          <a:xfrm>
+            <a:off x="5781751" y="6290035"/>
+            <a:ext cx="932688" cy="272605"/>
+          </a:xfrm>
+          <a:prstGeom prst="rect">
+            <a:avLst/>
+          </a:prstGeom>
+          <a:noFill/>
+        </p:spPr>
+        <p:txBody>
+          <a:bodyPr wrap="square">
+            <a:normAutofit/>
+          </a:bodyPr>
+          <a:lstStyle/>
+          <a:p>
+            <a:pPr algn="ctr"/>
+            <a:r>
+              <a:rPr sz="1000" b="0">
+                <a:solidFill>
+                  <a:srgbClr val="1A1A2E"/>
+                </a:solidFill>
+              </a:rPr>
+              <a:t>0.085</a:t>
+            </a:r>
+          </a:p>
+        </p:txBody>
+      </p:sp>
+      <p:sp>
+        <p:nvSpPr>
+          <p:cNvPr id="226" name="Rectangle 225"/>
+          <p:cNvSpPr/>
+          <p:nvPr/>
+        </p:nvSpPr>
+        <p:spPr>
+          <a:xfrm>
+            <a:off x="6751015" y="6253459"/>
+            <a:ext cx="1783080" cy="345757"/>
+          </a:xfrm>
+          <a:prstGeom prst="rect">
+            <a:avLst/>
+          </a:prstGeom>
+          <a:solidFill>
+            <a:srgbClr val="DDF5E8"/>
+          </a:solidFill>
+          <a:ln w="6350">
+            <a:solidFill>
+              <a:srgbClr val="CCCCCC"/>
+            </a:solidFill>
+          </a:ln>
+        </p:spPr>
+        <p:style>
+          <a:lnRef idx="1">
+            <a:schemeClr val="accent1"/>
+          </a:lnRef>
+          <a:fillRef idx="3">
+            <a:schemeClr val="accent1"/>
+          </a:fillRef>
+          <a:effectRef idx="2">
+            <a:schemeClr val="accent1"/>
+          </a:effectRef>
+          <a:fontRef idx="minor">
+            <a:schemeClr val="lt1"/>
+          </a:fontRef>
+        </p:style>
+        <p:txBody>
+          <a:bodyPr rtlCol="0" anchor="ctr"/>
+          <a:lstStyle/>
+          <a:p>
+            <a:pPr algn="ctr"/>
+          </a:p>
+        </p:txBody>
+      </p:sp>
+      <p:sp>
+        <p:nvSpPr>
+          <p:cNvPr id="227" name="TextBox 226"/>
+          <p:cNvSpPr txBox="1"/>
+          <p:nvPr/>
+        </p:nvSpPr>
+        <p:spPr>
+          <a:xfrm>
+            <a:off x="6787591" y="6290035"/>
+            <a:ext cx="1709928" cy="272605"/>
+          </a:xfrm>
+          <a:prstGeom prst="rect">
+            <a:avLst/>
+          </a:prstGeom>
+          <a:noFill/>
+        </p:spPr>
+        <p:txBody>
+          <a:bodyPr wrap="square">
+            <a:normAutofit/>
+          </a:bodyPr>
+          <a:lstStyle/>
+          <a:p>
+            <a:pPr algn="ctr"/>
+            <a:r>
+              <a:rPr sz="900" b="0">
+                <a:solidFill>
+                  <a:srgbClr val="1A1A2E"/>
+                </a:solidFill>
+              </a:rPr>
+              <a:t>（新システム・新規）</a:t>
             </a:r>
           </a:p>
         </p:txBody>
@@ -10353,8 +11459,8 @@
         </p:blipFill>
         <p:spPr>
           <a:xfrm>
-            <a:off x="304495" y="1075620"/>
-            <a:ext cx="5943600" cy="4737847"/>
+            <a:off x="304495" y="1070687"/>
+            <a:ext cx="5943600" cy="4747713"/>
           </a:xfrm>
           <a:prstGeom prst="rect">
             <a:avLst/>
@@ -10519,8 +11625,8 @@
         </p:blipFill>
         <p:spPr>
           <a:xfrm>
-            <a:off x="304495" y="1225656"/>
-            <a:ext cx="5943600" cy="4437776"/>
+            <a:off x="304495" y="1219891"/>
+            <a:ext cx="5943600" cy="4449305"/>
           </a:xfrm>
           <a:prstGeom prst="rect">
             <a:avLst/>
@@ -10688,8 +11794,8 @@
         </p:blipFill>
         <p:spPr>
           <a:xfrm>
-            <a:off x="304495" y="1075620"/>
-            <a:ext cx="5943600" cy="4737847"/>
+            <a:off x="304495" y="1070687"/>
+            <a:ext cx="5943600" cy="4747713"/>
           </a:xfrm>
           <a:prstGeom prst="rect">
             <a:avLst/>
@@ -10854,8 +11960,8 @@
         </p:blipFill>
         <p:spPr>
           <a:xfrm>
-            <a:off x="304495" y="1655318"/>
-            <a:ext cx="5943600" cy="2938371"/>
+            <a:off x="304495" y="1654456"/>
+            <a:ext cx="5943600" cy="2940096"/>
           </a:xfrm>
           <a:prstGeom prst="rect">
             <a:avLst/>
@@ -11021,8 +12127,8 @@
         </p:blipFill>
         <p:spPr>
           <a:xfrm>
-            <a:off x="304495" y="1530162"/>
-            <a:ext cx="5943600" cy="3280124"/>
+            <a:off x="304495" y="1531186"/>
+            <a:ext cx="5943600" cy="3278075"/>
           </a:xfrm>
           <a:prstGeom prst="rect">
             <a:avLst/>
@@ -11189,8 +12295,8 @@
         </p:blipFill>
         <p:spPr>
           <a:xfrm>
-            <a:off x="304495" y="1074492"/>
-            <a:ext cx="4160520" cy="3185624"/>
+            <a:off x="304495" y="1075029"/>
+            <a:ext cx="4160520" cy="3184550"/>
           </a:xfrm>
           <a:prstGeom prst="rect">
             <a:avLst/>
@@ -11213,8 +12319,8 @@
         </p:blipFill>
         <p:spPr>
           <a:xfrm>
-            <a:off x="4647895" y="1074492"/>
-            <a:ext cx="4160520" cy="3185624"/>
+            <a:off x="4647895" y="1075029"/>
+            <a:ext cx="4160520" cy="3184550"/>
           </a:xfrm>
           <a:prstGeom prst="rect">
             <a:avLst/>
@@ -11374,8 +12480,8 @@
         </p:blipFill>
         <p:spPr>
           <a:xfrm>
-            <a:off x="304495" y="1656144"/>
-            <a:ext cx="5943600" cy="2936719"/>
+            <a:off x="304495" y="1652787"/>
+            <a:ext cx="5943600" cy="2943433"/>
           </a:xfrm>
           <a:prstGeom prst="rect">
             <a:avLst/>
